--- a/files/prezentacii/nvp-8-pervaya-pomoshch-praktikum.pptx
+++ b/files/prezentacii/nvp-8-pervaya-pomoshch-praktikum.pptx
@@ -1217,7 +1217,7 @@
           <a:p>
             <a:r>
               <a:rPr lang="en-US" dirty="0"/>
-              <a:t>Жгут накладывается на тренажёр или валик из свёрнутой одежды, на живом человеке не затягивается.</a:t>
+              <a:t>Проверка дыхания: смотрю, слушаю, ощущаю, не более 10 секунд. При отсутствии дыхания — вызов помощи и начало реанимации.</a:t>
             </a:r>
             <a:endParaRPr lang="en-US" dirty="0"/>
           </a:p>
@@ -1305,7 +1305,7 @@
           <a:p>
             <a:r>
               <a:rPr lang="en-US" dirty="0"/>
-              <a:t>Проверка дыхания: смотрю, слушаю, ощущаю, не более 10 секунд. При отсутствии дыхания — вызов помощи и начало реанимации.</a:t>
+              <a:t>Метроном 100–120 ударов в минуту. При отсутствии тренажёра можно использовать плотную подушку.</a:t>
             </a:r>
             <a:endParaRPr lang="en-US" dirty="0"/>
           </a:p>
@@ -1393,7 +1393,7 @@
           <a:p>
             <a:r>
               <a:rPr lang="en-US" dirty="0"/>
-              <a:t>Метроном 100–120 ударов в минуту. При отсутствии тренажёра можно использовать плотную подушку.</a:t>
+              <a:t>Жгут накладывается на тренажёр или валик из свёрнутой одежды, на живом человеке не затягивается.</a:t>
             </a:r>
             <a:endParaRPr lang="en-US" dirty="0"/>
           </a:p>
@@ -1965,7 +1965,7 @@
                 <a:ea typeface="Calibri" pitchFamily="34" charset="-122"/>
                 <a:cs typeface="Calibri" pitchFamily="34" charset="-120"/>
               </a:rPr>
-              <a:t>Моделирование ситуаций: кровотечение, потеря сознания, травма</a:t>
+              <a:t>Моделирование ситуаций: потеря сознания, кровотечение, травма</a:t>
             </a:r>
             <a:endParaRPr lang="en-US" sz="1800" dirty="0"/>
           </a:p>
@@ -6929,7 +6929,7 @@
                 <a:ea typeface="Cambria" pitchFamily="34" charset="-122"/>
                 <a:cs typeface="Cambria" pitchFamily="34" charset="-120"/>
               </a:rPr>
-              <a:t>Станция 1. «Кровотечение»</a:t>
+              <a:t>Станция 1. «Без сознания»</a:t>
             </a:r>
             <a:endParaRPr lang="en-US" sz="3400" dirty="0"/>
           </a:p>
@@ -7021,12 +7021,12 @@
         </p:nvSpPr>
         <p:spPr>
           <a:xfrm>
-            <a:off x="457200" y="1234440"/>
-            <a:ext cx="3840480" cy="2926080"/>
+            <a:off x="457200" y="1188720"/>
+            <a:ext cx="4937760" cy="548640"/>
           </a:xfrm>
           <a:prstGeom prst="roundRect">
             <a:avLst>
-              <a:gd name="adj" fmla="val 2500"/>
+              <a:gd name="adj" fmla="val 13333"/>
             </a:avLst>
           </a:prstGeom>
           <a:solidFill>
@@ -7042,18 +7042,113 @@
       </p:sp>
       <p:sp>
         <p:nvSpPr>
-          <p:cNvPr id="6" name="card"/>
+          <p:cNvPr id="6" name="Text 4"/>
+          <p:cNvSpPr txBox="1"/>
+          <p:nvPr/>
+        </p:nvSpPr>
+        <p:spPr>
+          <a:xfrm>
+            <a:off x="566928" y="1188720"/>
+            <a:ext cx="365760" cy="548640"/>
+          </a:xfrm>
+          <a:prstGeom prst="rect">
+            <a:avLst/>
+          </a:prstGeom>
+          <a:noFill/>
+          <a:ln/>
+        </p:spPr>
+        <p:txBody>
+          <a:bodyPr wrap="square" lIns="0" tIns="0" rIns="0" bIns="0" rtlCol="0" anchor="ctr"/>
+          <a:lstStyle/>
+          <a:p>
+            <a:pPr indent="0" marL="0">
+              <a:buNone/>
+            </a:pPr>
+            <a:r>
+              <a:rPr lang="en-US" sz="2000" b="1" dirty="0">
+                <a:solidFill>
+                  <a:srgbClr val="003D7A"/>
+                </a:solidFill>
+                <a:latin typeface="Cambria" pitchFamily="34" charset="0"/>
+                <a:ea typeface="Cambria" pitchFamily="34" charset="-122"/>
+                <a:cs typeface="Cambria" pitchFamily="34" charset="-120"/>
+              </a:rPr>
+              <a:t>1</a:t>
+            </a:r>
+            <a:endParaRPr lang="en-US" sz="2000" dirty="0"/>
+          </a:p>
+        </p:txBody>
+      </p:sp>
+      <p:sp>
+        <p:nvSpPr>
+          <p:cNvPr id="7" name="Text 5"/>
+          <p:cNvSpPr txBox="1"/>
+          <p:nvPr/>
+        </p:nvSpPr>
+        <p:spPr>
+          <a:xfrm>
+            <a:off x="960120" y="1188720"/>
+            <a:ext cx="4343400" cy="548640"/>
+          </a:xfrm>
+          <a:prstGeom prst="rect">
+            <a:avLst/>
+          </a:prstGeom>
+          <a:noFill/>
+          <a:ln/>
+        </p:spPr>
+        <p:txBody>
+          <a:bodyPr wrap="square" lIns="0" tIns="0" rIns="0" bIns="0" rtlCol="0" anchor="ctr"/>
+          <a:lstStyle/>
+          <a:p>
+            <a:pPr indent="0" marL="0">
+              <a:buNone/>
+            </a:pPr>
+            <a:r>
+              <a:rPr lang="en-US" sz="1400" b="1" dirty="0">
+                <a:solidFill>
+                  <a:srgbClr val="1F2A37"/>
+                </a:solidFill>
+                <a:latin typeface="Calibri" pitchFamily="34" charset="0"/>
+                <a:ea typeface="Calibri" pitchFamily="34" charset="-122"/>
+                <a:cs typeface="Calibri" pitchFamily="34" charset="-120"/>
+              </a:rPr>
+              <a:t>Оцени безопасность</a:t>
+            </a:r>
+            <a:endParaRPr lang="en-US" sz="1400" dirty="0"/>
+          </a:p>
+          <a:p>
+            <a:pPr indent="0" marL="0">
+              <a:buNone/>
+            </a:pPr>
+            <a:r>
+              <a:rPr lang="en-US" sz="1200" dirty="0">
+                <a:solidFill>
+                  <a:srgbClr val="5B6675"/>
+                </a:solidFill>
+                <a:latin typeface="Calibri" pitchFamily="34" charset="0"/>
+                <a:ea typeface="Calibri" pitchFamily="34" charset="-122"/>
+                <a:cs typeface="Calibri" pitchFamily="34" charset="-120"/>
+              </a:rPr>
+              <a:t>Убедись, что место безопасно</a:t>
+            </a:r>
+            <a:endParaRPr lang="en-US" sz="1400" dirty="0"/>
+          </a:p>
+        </p:txBody>
+      </p:sp>
+      <p:sp>
+        <p:nvSpPr>
+          <p:cNvPr id="8" name="card"/>
           <p:cNvSpPr/>
           <p:nvPr/>
         </p:nvSpPr>
         <p:spPr>
           <a:xfrm>
-            <a:off x="4572000" y="1234440"/>
-            <a:ext cx="4114800" cy="2926080"/>
+            <a:off x="457200" y="1810512"/>
+            <a:ext cx="4937760" cy="548640"/>
           </a:xfrm>
           <a:prstGeom prst="roundRect">
             <a:avLst>
-              <a:gd name="adj" fmla="val 2500"/>
+              <a:gd name="adj" fmla="val 13333"/>
             </a:avLst>
           </a:prstGeom>
           <a:solidFill>
@@ -7069,63 +7164,136 @@
       </p:sp>
       <p:sp>
         <p:nvSpPr>
-          <p:cNvPr id="7" name="st1-icon-bg"/>
+          <p:cNvPr id="9" name="Text 7"/>
+          <p:cNvSpPr txBox="1"/>
+          <p:nvPr/>
+        </p:nvSpPr>
+        <p:spPr>
+          <a:xfrm>
+            <a:off x="566928" y="1810512"/>
+            <a:ext cx="365760" cy="548640"/>
+          </a:xfrm>
+          <a:prstGeom prst="rect">
+            <a:avLst/>
+          </a:prstGeom>
+          <a:noFill/>
+          <a:ln/>
+        </p:spPr>
+        <p:txBody>
+          <a:bodyPr wrap="square" lIns="0" tIns="0" rIns="0" bIns="0" rtlCol="0" anchor="ctr"/>
+          <a:lstStyle/>
+          <a:p>
+            <a:pPr indent="0" marL="0">
+              <a:buNone/>
+            </a:pPr>
+            <a:r>
+              <a:rPr lang="en-US" sz="2000" b="1" dirty="0">
+                <a:solidFill>
+                  <a:srgbClr val="003D7A"/>
+                </a:solidFill>
+                <a:latin typeface="Cambria" pitchFamily="34" charset="0"/>
+                <a:ea typeface="Cambria" pitchFamily="34" charset="-122"/>
+                <a:cs typeface="Cambria" pitchFamily="34" charset="-120"/>
+              </a:rPr>
+              <a:t>2</a:t>
+            </a:r>
+            <a:endParaRPr lang="en-US" sz="2000" dirty="0"/>
+          </a:p>
+        </p:txBody>
+      </p:sp>
+      <p:sp>
+        <p:nvSpPr>
+          <p:cNvPr id="10" name="Text 8"/>
+          <p:cNvSpPr txBox="1"/>
+          <p:nvPr/>
+        </p:nvSpPr>
+        <p:spPr>
+          <a:xfrm>
+            <a:off x="960120" y="1810512"/>
+            <a:ext cx="4343400" cy="548640"/>
+          </a:xfrm>
+          <a:prstGeom prst="rect">
+            <a:avLst/>
+          </a:prstGeom>
+          <a:noFill/>
+          <a:ln/>
+        </p:spPr>
+        <p:txBody>
+          <a:bodyPr wrap="square" lIns="0" tIns="0" rIns="0" bIns="0" rtlCol="0" anchor="ctr"/>
+          <a:lstStyle/>
+          <a:p>
+            <a:pPr indent="0" marL="0">
+              <a:buNone/>
+            </a:pPr>
+            <a:r>
+              <a:rPr lang="en-US" sz="1400" b="1" dirty="0">
+                <a:solidFill>
+                  <a:srgbClr val="1F2A37"/>
+                </a:solidFill>
+                <a:latin typeface="Calibri" pitchFamily="34" charset="0"/>
+                <a:ea typeface="Calibri" pitchFamily="34" charset="-122"/>
+                <a:cs typeface="Calibri" pitchFamily="34" charset="-120"/>
+              </a:rPr>
+              <a:t>Проверь реакцию</a:t>
+            </a:r>
+            <a:endParaRPr lang="en-US" sz="1400" dirty="0"/>
+          </a:p>
+          <a:p>
+            <a:pPr indent="0" marL="0">
+              <a:buNone/>
+            </a:pPr>
+            <a:r>
+              <a:rPr lang="en-US" sz="1200" dirty="0">
+                <a:solidFill>
+                  <a:srgbClr val="5B6675"/>
+                </a:solidFill>
+                <a:latin typeface="Calibri" pitchFamily="34" charset="0"/>
+                <a:ea typeface="Calibri" pitchFamily="34" charset="-122"/>
+                <a:cs typeface="Calibri" pitchFamily="34" charset="-120"/>
+              </a:rPr>
+              <a:t>Окликни, аккуратно потряси за плечи</a:t>
+            </a:r>
+            <a:endParaRPr lang="en-US" sz="1400" dirty="0"/>
+          </a:p>
+        </p:txBody>
+      </p:sp>
+      <p:sp>
+        <p:nvSpPr>
+          <p:cNvPr id="11" name="card"/>
           <p:cNvSpPr/>
           <p:nvPr/>
         </p:nvSpPr>
         <p:spPr>
           <a:xfrm>
-            <a:off x="640080" y="1417320"/>
-            <a:ext cx="640080" cy="640080"/>
-          </a:xfrm>
-          <a:prstGeom prst="ellipse">
-            <a:avLst/>
+            <a:off x="457200" y="2432304"/>
+            <a:ext cx="4937760" cy="548640"/>
+          </a:xfrm>
+          <a:prstGeom prst="roundRect">
+            <a:avLst>
+              <a:gd name="adj" fmla="val 13333"/>
+            </a:avLst>
           </a:prstGeom>
           <a:solidFill>
-            <a:srgbClr val="E53935"/>
+            <a:srgbClr val="F3F6FA"/>
           </a:solidFill>
-          <a:ln w="12700">
+          <a:ln w="9525">
             <a:solidFill>
-              <a:srgbClr val="E53935"/>
+              <a:srgbClr val="DDE3EB"/>
             </a:solidFill>
             <a:prstDash val="solid"/>
           </a:ln>
         </p:spPr>
       </p:sp>
-      <p:pic>
-        <p:nvPicPr>
-          <p:cNvPr id="8" name="st1-icon" descr="preencoded.png">    </p:cNvPr>
-          <p:cNvPicPr>
-            <a:picLocks noChangeAspect="1"/>
-          </p:cNvPicPr>
-          <p:nvPr/>
-        </p:nvPicPr>
-        <p:blipFill>
-          <a:blip r:embed="rId1"/>
-          <a:stretch>
-            <a:fillRect/>
-          </a:stretch>
-        </p:blipFill>
-        <p:spPr>
-          <a:xfrm>
-            <a:off x="806501" y="1583741"/>
-            <a:ext cx="307238" cy="307238"/>
-          </a:xfrm>
-          <a:prstGeom prst="rect">
-            <a:avLst/>
-          </a:prstGeom>
-        </p:spPr>
-      </p:pic>
-      <p:sp>
-        <p:nvSpPr>
-          <p:cNvPr id="9" name="Text 6"/>
-          <p:cNvSpPr txBox="1"/>
-          <p:nvPr/>
-        </p:nvSpPr>
-        <p:spPr>
-          <a:xfrm>
-            <a:off x="1417320" y="1463040"/>
-            <a:ext cx="2743200" cy="365760"/>
+      <p:sp>
+        <p:nvSpPr>
+          <p:cNvPr id="12" name="Text 10"/>
+          <p:cNvSpPr txBox="1"/>
+          <p:nvPr/>
+        </p:nvSpPr>
+        <p:spPr>
+          <a:xfrm>
+            <a:off x="566928" y="2432304"/>
+            <a:ext cx="365760" cy="548640"/>
           </a:xfrm>
           <a:prstGeom prst="rect">
             <a:avLst/>
@@ -7141,30 +7309,301 @@
               <a:buNone/>
             </a:pPr>
             <a:r>
-              <a:rPr lang="en-US" sz="1800" b="1" dirty="0">
+              <a:rPr lang="en-US" sz="2000" b="1" dirty="0">
                 <a:solidFill>
                   <a:srgbClr val="003D7A"/>
                 </a:solidFill>
-                <a:latin typeface="Calibri" pitchFamily="34" charset="0"/>
-                <a:ea typeface="Calibri" pitchFamily="34" charset="-122"/>
-                <a:cs typeface="Calibri" pitchFamily="34" charset="-120"/>
-              </a:rPr>
-              <a:t>Ситуация</a:t>
-            </a:r>
-            <a:endParaRPr lang="en-US" sz="1800" dirty="0"/>
-          </a:p>
-        </p:txBody>
-      </p:sp>
-      <p:sp>
-        <p:nvSpPr>
-          <p:cNvPr id="10" name="Text 7"/>
-          <p:cNvSpPr txBox="1"/>
-          <p:nvPr/>
-        </p:nvSpPr>
-        <p:spPr>
-          <a:xfrm>
-            <a:off x="640080" y="2194560"/>
-            <a:ext cx="3474720" cy="914400"/>
+                <a:latin typeface="Cambria" pitchFamily="34" charset="0"/>
+                <a:ea typeface="Cambria" pitchFamily="34" charset="-122"/>
+                <a:cs typeface="Cambria" pitchFamily="34" charset="-120"/>
+              </a:rPr>
+              <a:t>3</a:t>
+            </a:r>
+            <a:endParaRPr lang="en-US" sz="2000" dirty="0"/>
+          </a:p>
+        </p:txBody>
+      </p:sp>
+      <p:sp>
+        <p:nvSpPr>
+          <p:cNvPr id="13" name="Text 11"/>
+          <p:cNvSpPr txBox="1"/>
+          <p:nvPr/>
+        </p:nvSpPr>
+        <p:spPr>
+          <a:xfrm>
+            <a:off x="960120" y="2432304"/>
+            <a:ext cx="4343400" cy="548640"/>
+          </a:xfrm>
+          <a:prstGeom prst="rect">
+            <a:avLst/>
+          </a:prstGeom>
+          <a:noFill/>
+          <a:ln/>
+        </p:spPr>
+        <p:txBody>
+          <a:bodyPr wrap="square" lIns="0" tIns="0" rIns="0" bIns="0" rtlCol="0" anchor="ctr"/>
+          <a:lstStyle/>
+          <a:p>
+            <a:pPr indent="0" marL="0">
+              <a:buNone/>
+            </a:pPr>
+            <a:r>
+              <a:rPr lang="en-US" sz="1400" b="1" dirty="0">
+                <a:solidFill>
+                  <a:srgbClr val="1F2A37"/>
+                </a:solidFill>
+                <a:latin typeface="Calibri" pitchFamily="34" charset="0"/>
+                <a:ea typeface="Calibri" pitchFamily="34" charset="-122"/>
+                <a:cs typeface="Calibri" pitchFamily="34" charset="-120"/>
+              </a:rPr>
+              <a:t>Освободи дыхательные пути</a:t>
+            </a:r>
+            <a:endParaRPr lang="en-US" sz="1400" dirty="0"/>
+          </a:p>
+          <a:p>
+            <a:pPr indent="0" marL="0">
+              <a:buNone/>
+            </a:pPr>
+            <a:r>
+              <a:rPr lang="en-US" sz="1200" dirty="0">
+                <a:solidFill>
+                  <a:srgbClr val="5B6675"/>
+                </a:solidFill>
+                <a:latin typeface="Calibri" pitchFamily="34" charset="0"/>
+                <a:ea typeface="Calibri" pitchFamily="34" charset="-122"/>
+                <a:cs typeface="Calibri" pitchFamily="34" charset="-120"/>
+              </a:rPr>
+              <a:t>Запрокинь голову, подними подбородок</a:t>
+            </a:r>
+            <a:endParaRPr lang="en-US" sz="1400" dirty="0"/>
+          </a:p>
+        </p:txBody>
+      </p:sp>
+      <p:sp>
+        <p:nvSpPr>
+          <p:cNvPr id="14" name="card"/>
+          <p:cNvSpPr/>
+          <p:nvPr/>
+        </p:nvSpPr>
+        <p:spPr>
+          <a:xfrm>
+            <a:off x="457200" y="3054096"/>
+            <a:ext cx="4937760" cy="548640"/>
+          </a:xfrm>
+          <a:prstGeom prst="roundRect">
+            <a:avLst>
+              <a:gd name="adj" fmla="val 13333"/>
+            </a:avLst>
+          </a:prstGeom>
+          <a:solidFill>
+            <a:srgbClr val="F3F6FA"/>
+          </a:solidFill>
+          <a:ln w="9525">
+            <a:solidFill>
+              <a:srgbClr val="DDE3EB"/>
+            </a:solidFill>
+            <a:prstDash val="solid"/>
+          </a:ln>
+        </p:spPr>
+      </p:sp>
+      <p:sp>
+        <p:nvSpPr>
+          <p:cNvPr id="15" name="Text 13"/>
+          <p:cNvSpPr txBox="1"/>
+          <p:nvPr/>
+        </p:nvSpPr>
+        <p:spPr>
+          <a:xfrm>
+            <a:off x="566928" y="3054096"/>
+            <a:ext cx="365760" cy="548640"/>
+          </a:xfrm>
+          <a:prstGeom prst="rect">
+            <a:avLst/>
+          </a:prstGeom>
+          <a:noFill/>
+          <a:ln/>
+        </p:spPr>
+        <p:txBody>
+          <a:bodyPr wrap="square" lIns="0" tIns="0" rIns="0" bIns="0" rtlCol="0" anchor="ctr"/>
+          <a:lstStyle/>
+          <a:p>
+            <a:pPr indent="0" marL="0">
+              <a:buNone/>
+            </a:pPr>
+            <a:r>
+              <a:rPr lang="en-US" sz="2000" b="1" dirty="0">
+                <a:solidFill>
+                  <a:srgbClr val="003D7A"/>
+                </a:solidFill>
+                <a:latin typeface="Cambria" pitchFamily="34" charset="0"/>
+                <a:ea typeface="Cambria" pitchFamily="34" charset="-122"/>
+                <a:cs typeface="Cambria" pitchFamily="34" charset="-120"/>
+              </a:rPr>
+              <a:t>4</a:t>
+            </a:r>
+            <a:endParaRPr lang="en-US" sz="2000" dirty="0"/>
+          </a:p>
+        </p:txBody>
+      </p:sp>
+      <p:sp>
+        <p:nvSpPr>
+          <p:cNvPr id="16" name="Text 14"/>
+          <p:cNvSpPr txBox="1"/>
+          <p:nvPr/>
+        </p:nvSpPr>
+        <p:spPr>
+          <a:xfrm>
+            <a:off x="960120" y="3054096"/>
+            <a:ext cx="4343400" cy="548640"/>
+          </a:xfrm>
+          <a:prstGeom prst="rect">
+            <a:avLst/>
+          </a:prstGeom>
+          <a:noFill/>
+          <a:ln/>
+        </p:spPr>
+        <p:txBody>
+          <a:bodyPr wrap="square" lIns="0" tIns="0" rIns="0" bIns="0" rtlCol="0" anchor="ctr"/>
+          <a:lstStyle/>
+          <a:p>
+            <a:pPr indent="0" marL="0">
+              <a:buNone/>
+            </a:pPr>
+            <a:r>
+              <a:rPr lang="en-US" sz="1400" b="1" dirty="0">
+                <a:solidFill>
+                  <a:srgbClr val="1F2A37"/>
+                </a:solidFill>
+                <a:latin typeface="Calibri" pitchFamily="34" charset="0"/>
+                <a:ea typeface="Calibri" pitchFamily="34" charset="-122"/>
+                <a:cs typeface="Calibri" pitchFamily="34" charset="-120"/>
+              </a:rPr>
+              <a:t>Проверь дыхание</a:t>
+            </a:r>
+            <a:endParaRPr lang="en-US" sz="1400" dirty="0"/>
+          </a:p>
+          <a:p>
+            <a:pPr indent="0" marL="0">
+              <a:buNone/>
+            </a:pPr>
+            <a:r>
+              <a:rPr lang="en-US" sz="1200" dirty="0">
+                <a:solidFill>
+                  <a:srgbClr val="5B6675"/>
+                </a:solidFill>
+                <a:latin typeface="Calibri" pitchFamily="34" charset="0"/>
+                <a:ea typeface="Calibri" pitchFamily="34" charset="-122"/>
+                <a:cs typeface="Calibri" pitchFamily="34" charset="-120"/>
+              </a:rPr>
+              <a:t>Смотрю, слушаю, ощущаю — не более 10 секунд</a:t>
+            </a:r>
+            <a:endParaRPr lang="en-US" sz="1400" dirty="0"/>
+          </a:p>
+        </p:txBody>
+      </p:sp>
+      <p:sp>
+        <p:nvSpPr>
+          <p:cNvPr id="17" name="card"/>
+          <p:cNvSpPr/>
+          <p:nvPr/>
+        </p:nvSpPr>
+        <p:spPr>
+          <a:xfrm>
+            <a:off x="5669280" y="1188720"/>
+            <a:ext cx="3017520" cy="1371600"/>
+          </a:xfrm>
+          <a:prstGeom prst="roundRect">
+            <a:avLst>
+              <a:gd name="adj" fmla="val 5333"/>
+            </a:avLst>
+          </a:prstGeom>
+          <a:solidFill>
+            <a:srgbClr val="F3F6FA"/>
+          </a:solidFill>
+          <a:ln w="9525">
+            <a:solidFill>
+              <a:srgbClr val="DDE3EB"/>
+            </a:solidFill>
+            <a:prstDash val="solid"/>
+          </a:ln>
+        </p:spPr>
+      </p:sp>
+      <p:sp>
+        <p:nvSpPr>
+          <p:cNvPr id="18" name="card"/>
+          <p:cNvSpPr/>
+          <p:nvPr/>
+        </p:nvSpPr>
+        <p:spPr>
+          <a:xfrm>
+            <a:off x="5669280" y="2697480"/>
+            <a:ext cx="3017520" cy="1371600"/>
+          </a:xfrm>
+          <a:prstGeom prst="roundRect">
+            <a:avLst>
+              <a:gd name="adj" fmla="val 5333"/>
+            </a:avLst>
+          </a:prstGeom>
+          <a:solidFill>
+            <a:srgbClr val="F3F6FA"/>
+          </a:solidFill>
+          <a:ln w="9525">
+            <a:solidFill>
+              <a:srgbClr val="DDE3EB"/>
+            </a:solidFill>
+            <a:prstDash val="solid"/>
+          </a:ln>
+        </p:spPr>
+      </p:sp>
+      <p:sp>
+        <p:nvSpPr>
+          <p:cNvPr id="19" name="Text 17"/>
+          <p:cNvSpPr txBox="1"/>
+          <p:nvPr/>
+        </p:nvSpPr>
+        <p:spPr>
+          <a:xfrm>
+            <a:off x="5806440" y="1261872"/>
+            <a:ext cx="2743200" cy="320040"/>
+          </a:xfrm>
+          <a:prstGeom prst="rect">
+            <a:avLst/>
+          </a:prstGeom>
+          <a:noFill/>
+          <a:ln/>
+        </p:spPr>
+        <p:txBody>
+          <a:bodyPr wrap="square" lIns="0" tIns="0" rIns="0" bIns="0" rtlCol="0" anchor="ctr"/>
+          <a:lstStyle/>
+          <a:p>
+            <a:pPr indent="0" marL="0">
+              <a:buNone/>
+            </a:pPr>
+            <a:r>
+              <a:rPr lang="en-US" sz="1500" b="1" dirty="0">
+                <a:solidFill>
+                  <a:srgbClr val="003D7A"/>
+                </a:solidFill>
+                <a:latin typeface="Calibri" pitchFamily="34" charset="0"/>
+                <a:ea typeface="Calibri" pitchFamily="34" charset="-122"/>
+                <a:cs typeface="Calibri" pitchFamily="34" charset="-120"/>
+              </a:rPr>
+              <a:t>Дыхание есть</a:t>
+            </a:r>
+            <a:endParaRPr lang="en-US" sz="1500" dirty="0"/>
+          </a:p>
+        </p:txBody>
+      </p:sp>
+      <p:sp>
+        <p:nvSpPr>
+          <p:cNvPr id="20" name="Text 18"/>
+          <p:cNvSpPr txBox="1"/>
+          <p:nvPr/>
+        </p:nvSpPr>
+        <p:spPr>
+          <a:xfrm>
+            <a:off x="5806440" y="1627632"/>
+            <a:ext cx="2743200" cy="868680"/>
           </a:xfrm>
           <a:prstGeom prst="rect">
             <a:avLst/>
@@ -7180,7 +7619,7 @@
               <a:buNone/>
             </a:pPr>
             <a:r>
-              <a:rPr lang="en-US" sz="1600" dirty="0">
+              <a:rPr lang="en-US" sz="1300" dirty="0">
                 <a:solidFill>
                   <a:srgbClr val="1F2A37"/>
                 </a:solidFill>
@@ -7188,22 +7627,61 @@
                 <a:ea typeface="Calibri" pitchFamily="34" charset="-122"/>
                 <a:cs typeface="Calibri" pitchFamily="34" charset="-120"/>
               </a:rPr>
-              <a:t>Рана предплечья, кровь бьёт струёй.</a:t>
-            </a:r>
-            <a:endParaRPr lang="en-US" sz="1600" dirty="0"/>
-          </a:p>
-        </p:txBody>
-      </p:sp>
-      <p:sp>
-        <p:nvSpPr>
-          <p:cNvPr id="11" name="Text 8"/>
-          <p:cNvSpPr txBox="1"/>
-          <p:nvPr/>
-        </p:nvSpPr>
-        <p:spPr>
-          <a:xfrm>
-            <a:off x="640080" y="3200400"/>
-            <a:ext cx="3474720" cy="822960"/>
+              <a:t>Устойчивое боковое положение, наблюдение, вызов помощи</a:t>
+            </a:r>
+            <a:endParaRPr lang="en-US" sz="1300" dirty="0"/>
+          </a:p>
+        </p:txBody>
+      </p:sp>
+      <p:sp>
+        <p:nvSpPr>
+          <p:cNvPr id="21" name="Text 19"/>
+          <p:cNvSpPr txBox="1"/>
+          <p:nvPr/>
+        </p:nvSpPr>
+        <p:spPr>
+          <a:xfrm>
+            <a:off x="5806440" y="2770632"/>
+            <a:ext cx="2743200" cy="320040"/>
+          </a:xfrm>
+          <a:prstGeom prst="rect">
+            <a:avLst/>
+          </a:prstGeom>
+          <a:noFill/>
+          <a:ln/>
+        </p:spPr>
+        <p:txBody>
+          <a:bodyPr wrap="square" lIns="0" tIns="0" rIns="0" bIns="0" rtlCol="0" anchor="ctr"/>
+          <a:lstStyle/>
+          <a:p>
+            <a:pPr indent="0" marL="0">
+              <a:buNone/>
+            </a:pPr>
+            <a:r>
+              <a:rPr lang="en-US" sz="1500" b="1" dirty="0">
+                <a:solidFill>
+                  <a:srgbClr val="E53935"/>
+                </a:solidFill>
+                <a:latin typeface="Calibri" pitchFamily="34" charset="0"/>
+                <a:ea typeface="Calibri" pitchFamily="34" charset="-122"/>
+                <a:cs typeface="Calibri" pitchFamily="34" charset="-120"/>
+              </a:rPr>
+              <a:t>Дыхания нет</a:t>
+            </a:r>
+            <a:endParaRPr lang="en-US" sz="1500" dirty="0"/>
+          </a:p>
+        </p:txBody>
+      </p:sp>
+      <p:sp>
+        <p:nvSpPr>
+          <p:cNvPr id="22" name="Text 20"/>
+          <p:cNvSpPr txBox="1"/>
+          <p:nvPr/>
+        </p:nvSpPr>
+        <p:spPr>
+          <a:xfrm>
+            <a:off x="5806440" y="3136392"/>
+            <a:ext cx="2743200" cy="868680"/>
           </a:xfrm>
           <a:prstGeom prst="rect">
             <a:avLst/>
@@ -7219,162 +7697,56 @@
               <a:buNone/>
             </a:pPr>
             <a:r>
-              <a:rPr lang="en-US" sz="1400" dirty="0">
-                <a:solidFill>
-                  <a:srgbClr val="5B6675"/>
-                </a:solidFill>
-                <a:latin typeface="Calibri" pitchFamily="34" charset="0"/>
-                <a:ea typeface="Calibri" pitchFamily="34" charset="-122"/>
-                <a:cs typeface="Calibri" pitchFamily="34" charset="-120"/>
-              </a:rPr>
-              <a:t>Время наложения жгута нужно зафиксировать.</a:t>
+              <a:rPr lang="en-US" sz="1300" dirty="0">
+                <a:solidFill>
+                  <a:srgbClr val="1F2A37"/>
+                </a:solidFill>
+                <a:latin typeface="Calibri" pitchFamily="34" charset="0"/>
+                <a:ea typeface="Calibri" pitchFamily="34" charset="-122"/>
+                <a:cs typeface="Calibri" pitchFamily="34" charset="-120"/>
+              </a:rPr>
+              <a:t>Вызов помощи и начало реанимации: 30 : 2</a:t>
+            </a:r>
+            <a:endParaRPr lang="en-US" sz="1300" dirty="0"/>
+          </a:p>
+        </p:txBody>
+      </p:sp>
+      <p:sp>
+        <p:nvSpPr>
+          <p:cNvPr id="23" name="Text 21"/>
+          <p:cNvSpPr txBox="1"/>
+          <p:nvPr/>
+        </p:nvSpPr>
+        <p:spPr>
+          <a:xfrm>
+            <a:off x="457200" y="4206240"/>
+            <a:ext cx="8229600" cy="365760"/>
+          </a:xfrm>
+          <a:prstGeom prst="rect">
+            <a:avLst/>
+          </a:prstGeom>
+          <a:noFill/>
+          <a:ln/>
+        </p:spPr>
+        <p:txBody>
+          <a:bodyPr wrap="square" lIns="0" tIns="0" rIns="0" bIns="0" rtlCol="0" anchor="ctr"/>
+          <a:lstStyle/>
+          <a:p>
+            <a:pPr indent="0" marL="0">
+              <a:buNone/>
+            </a:pPr>
+            <a:r>
+              <a:rPr lang="en-US" sz="1400" b="1" dirty="0">
+                <a:solidFill>
+                  <a:srgbClr val="E53935"/>
+                </a:solidFill>
+                <a:latin typeface="Calibri" pitchFamily="34" charset="0"/>
+                <a:ea typeface="Calibri" pitchFamily="34" charset="-122"/>
+                <a:cs typeface="Calibri" pitchFamily="34" charset="-120"/>
+              </a:rPr>
+              <a:t>Реанимацию отрабатываем только на тренажёре</a:t>
             </a:r>
             <a:endParaRPr lang="en-US" sz="1400" dirty="0"/>
-          </a:p>
-        </p:txBody>
-      </p:sp>
-      <p:sp>
-        <p:nvSpPr>
-          <p:cNvPr id="12" name="Text 9"/>
-          <p:cNvSpPr txBox="1"/>
-          <p:nvPr/>
-        </p:nvSpPr>
-        <p:spPr>
-          <a:xfrm>
-            <a:off x="4754880" y="1417320"/>
-            <a:ext cx="3657600" cy="365760"/>
-          </a:xfrm>
-          <a:prstGeom prst="rect">
-            <a:avLst/>
-          </a:prstGeom>
-          <a:noFill/>
-          <a:ln/>
-        </p:spPr>
-        <p:txBody>
-          <a:bodyPr wrap="square" lIns="0" tIns="0" rIns="0" bIns="0" rtlCol="0" anchor="ctr"/>
-          <a:lstStyle/>
-          <a:p>
-            <a:pPr indent="0" marL="0">
-              <a:buNone/>
-            </a:pPr>
-            <a:r>
-              <a:rPr lang="en-US" sz="1800" b="1" dirty="0">
-                <a:solidFill>
-                  <a:srgbClr val="003D7A"/>
-                </a:solidFill>
-                <a:latin typeface="Calibri" pitchFamily="34" charset="0"/>
-                <a:ea typeface="Calibri" pitchFamily="34" charset="-122"/>
-                <a:cs typeface="Calibri" pitchFamily="34" charset="-120"/>
-              </a:rPr>
-              <a:t>Что делаем</a:t>
-            </a:r>
-            <a:endParaRPr lang="en-US" sz="1800" dirty="0"/>
-          </a:p>
-        </p:txBody>
-      </p:sp>
-      <p:sp>
-        <p:nvSpPr>
-          <p:cNvPr id="13" name="Text 10"/>
-          <p:cNvSpPr txBox="1"/>
-          <p:nvPr/>
-        </p:nvSpPr>
-        <p:spPr>
-          <a:xfrm>
-            <a:off x="4754880" y="1920240"/>
-            <a:ext cx="3749040" cy="2103120"/>
-          </a:xfrm>
-          <a:prstGeom prst="rect">
-            <a:avLst/>
-          </a:prstGeom>
-          <a:noFill/>
-          <a:ln/>
-        </p:spPr>
-        <p:txBody>
-          <a:bodyPr wrap="square" lIns="0" tIns="0" rIns="0" bIns="0" rtlCol="0" anchor="t"/>
-          <a:lstStyle/>
-          <a:p>
-            <a:pPr marL="342900" indent="-342900">
-              <a:spcAft>
-                <a:spcPts val="800"/>
-              </a:spcAft>
-              <a:buSzPct val="100000"/>
-              <a:buChar char="•"/>
-            </a:pPr>
-            <a:r>
-              <a:rPr lang="en-US" sz="1600" dirty="0">
-                <a:solidFill>
-                  <a:srgbClr val="1F2A37"/>
-                </a:solidFill>
-                <a:latin typeface="Calibri" pitchFamily="34" charset="0"/>
-                <a:ea typeface="Calibri" pitchFamily="34" charset="-122"/>
-                <a:cs typeface="Calibri" pitchFamily="34" charset="-120"/>
-              </a:rPr>
-              <a:t>Прямое давление на рану</a:t>
-            </a:r>
-            <a:endParaRPr lang="en-US" sz="1600" dirty="0"/>
-          </a:p>
-          <a:p>
-            <a:pPr marL="342900" indent="-342900">
-              <a:spcAft>
-                <a:spcPts val="800"/>
-              </a:spcAft>
-              <a:buSzPct val="100000"/>
-              <a:buChar char="•"/>
-            </a:pPr>
-            <a:r>
-              <a:rPr lang="en-US" sz="1600" dirty="0">
-                <a:solidFill>
-                  <a:srgbClr val="1F2A37"/>
-                </a:solidFill>
-                <a:latin typeface="Calibri" pitchFamily="34" charset="0"/>
-                <a:ea typeface="Calibri" pitchFamily="34" charset="-122"/>
-                <a:cs typeface="Calibri" pitchFamily="34" charset="-120"/>
-              </a:rPr>
-              <a:t>Давящая повязка</a:t>
-            </a:r>
-            <a:endParaRPr lang="en-US" sz="1600" dirty="0"/>
-          </a:p>
-          <a:p>
-            <a:pPr marL="342900" indent="-342900">
-              <a:spcAft>
-                <a:spcPts val="800"/>
-              </a:spcAft>
-              <a:buSzPct val="100000"/>
-              <a:buChar char="•"/>
-            </a:pPr>
-            <a:r>
-              <a:rPr lang="en-US" sz="1600" dirty="0">
-                <a:solidFill>
-                  <a:srgbClr val="1F2A37"/>
-                </a:solidFill>
-                <a:latin typeface="Calibri" pitchFamily="34" charset="0"/>
-                <a:ea typeface="Calibri" pitchFamily="34" charset="-122"/>
-                <a:cs typeface="Calibri" pitchFamily="34" charset="-120"/>
-              </a:rPr>
-              <a:t>Жгут (на тренажёре) с отметкой времени</a:t>
-            </a:r>
-            <a:endParaRPr lang="en-US" sz="1600" dirty="0"/>
-          </a:p>
-          <a:p>
-            <a:pPr marL="342900" indent="-342900">
-              <a:spcAft>
-                <a:spcPts val="800"/>
-              </a:spcAft>
-              <a:buSzPct val="100000"/>
-              <a:buChar char="•"/>
-            </a:pPr>
-            <a:r>
-              <a:rPr lang="en-US" sz="1600" dirty="0">
-                <a:solidFill>
-                  <a:srgbClr val="1F2A37"/>
-                </a:solidFill>
-                <a:latin typeface="Calibri" pitchFamily="34" charset="0"/>
-                <a:ea typeface="Calibri" pitchFamily="34" charset="-122"/>
-                <a:cs typeface="Calibri" pitchFamily="34" charset="-120"/>
-              </a:rPr>
-              <a:t>Вызов помощи</a:t>
-            </a:r>
-            <a:endParaRPr lang="en-US" sz="1600" dirty="0"/>
           </a:p>
         </p:txBody>
       </p:sp>
@@ -7443,7 +7815,7 @@
                 <a:ea typeface="Cambria" pitchFamily="34" charset="-122"/>
                 <a:cs typeface="Cambria" pitchFamily="34" charset="-120"/>
               </a:rPr>
-              <a:t>Станция 2. «Без сознания»</a:t>
+              <a:t>Сердечно-лёгочная реанимация</a:t>
             </a:r>
             <a:endParaRPr lang="en-US" sz="3400" dirty="0"/>
           </a:p>
@@ -7535,12 +7907,12 @@
         </p:nvSpPr>
         <p:spPr>
           <a:xfrm>
-            <a:off x="457200" y="1188720"/>
-            <a:ext cx="4937760" cy="548640"/>
+            <a:off x="457200" y="1234440"/>
+            <a:ext cx="2651760" cy="2194560"/>
           </a:xfrm>
           <a:prstGeom prst="roundRect">
             <a:avLst>
-              <a:gd name="adj" fmla="val 13333"/>
+              <a:gd name="adj" fmla="val 3333"/>
             </a:avLst>
           </a:prstGeom>
           <a:solidFill>
@@ -7556,113 +7928,18 @@
       </p:sp>
       <p:sp>
         <p:nvSpPr>
-          <p:cNvPr id="6" name="Text 4"/>
-          <p:cNvSpPr txBox="1"/>
-          <p:nvPr/>
-        </p:nvSpPr>
-        <p:spPr>
-          <a:xfrm>
-            <a:off x="566928" y="1188720"/>
-            <a:ext cx="365760" cy="548640"/>
-          </a:xfrm>
-          <a:prstGeom prst="rect">
-            <a:avLst/>
-          </a:prstGeom>
-          <a:noFill/>
-          <a:ln/>
-        </p:spPr>
-        <p:txBody>
-          <a:bodyPr wrap="square" lIns="0" tIns="0" rIns="0" bIns="0" rtlCol="0" anchor="ctr"/>
-          <a:lstStyle/>
-          <a:p>
-            <a:pPr indent="0" marL="0">
-              <a:buNone/>
-            </a:pPr>
-            <a:r>
-              <a:rPr lang="en-US" sz="2000" b="1" dirty="0">
-                <a:solidFill>
-                  <a:srgbClr val="003D7A"/>
-                </a:solidFill>
-                <a:latin typeface="Cambria" pitchFamily="34" charset="0"/>
-                <a:ea typeface="Cambria" pitchFamily="34" charset="-122"/>
-                <a:cs typeface="Cambria" pitchFamily="34" charset="-120"/>
-              </a:rPr>
-              <a:t>1</a:t>
-            </a:r>
-            <a:endParaRPr lang="en-US" sz="2000" dirty="0"/>
-          </a:p>
-        </p:txBody>
-      </p:sp>
-      <p:sp>
-        <p:nvSpPr>
-          <p:cNvPr id="7" name="Text 5"/>
-          <p:cNvSpPr txBox="1"/>
-          <p:nvPr/>
-        </p:nvSpPr>
-        <p:spPr>
-          <a:xfrm>
-            <a:off x="960120" y="1188720"/>
-            <a:ext cx="4343400" cy="548640"/>
-          </a:xfrm>
-          <a:prstGeom prst="rect">
-            <a:avLst/>
-          </a:prstGeom>
-          <a:noFill/>
-          <a:ln/>
-        </p:spPr>
-        <p:txBody>
-          <a:bodyPr wrap="square" lIns="0" tIns="0" rIns="0" bIns="0" rtlCol="0" anchor="ctr"/>
-          <a:lstStyle/>
-          <a:p>
-            <a:pPr indent="0" marL="0">
-              <a:buNone/>
-            </a:pPr>
-            <a:r>
-              <a:rPr lang="en-US" sz="1400" b="1" dirty="0">
-                <a:solidFill>
-                  <a:srgbClr val="1F2A37"/>
-                </a:solidFill>
-                <a:latin typeface="Calibri" pitchFamily="34" charset="0"/>
-                <a:ea typeface="Calibri" pitchFamily="34" charset="-122"/>
-                <a:cs typeface="Calibri" pitchFamily="34" charset="-120"/>
-              </a:rPr>
-              <a:t>Оцени безопасность</a:t>
-            </a:r>
-            <a:endParaRPr lang="en-US" sz="1400" dirty="0"/>
-          </a:p>
-          <a:p>
-            <a:pPr indent="0" marL="0">
-              <a:buNone/>
-            </a:pPr>
-            <a:r>
-              <a:rPr lang="en-US" sz="1200" dirty="0">
-                <a:solidFill>
-                  <a:srgbClr val="5B6675"/>
-                </a:solidFill>
-                <a:latin typeface="Calibri" pitchFamily="34" charset="0"/>
-                <a:ea typeface="Calibri" pitchFamily="34" charset="-122"/>
-                <a:cs typeface="Calibri" pitchFamily="34" charset="-120"/>
-              </a:rPr>
-              <a:t>Убедись, что место безопасно</a:t>
-            </a:r>
-            <a:endParaRPr lang="en-US" sz="1400" dirty="0"/>
-          </a:p>
-        </p:txBody>
-      </p:sp>
-      <p:sp>
-        <p:nvSpPr>
-          <p:cNvPr id="8" name="card"/>
+          <p:cNvPr id="6" name="card"/>
           <p:cNvSpPr/>
           <p:nvPr/>
         </p:nvSpPr>
         <p:spPr>
           <a:xfrm>
-            <a:off x="457200" y="1810512"/>
-            <a:ext cx="4937760" cy="548640"/>
+            <a:off x="3246120" y="1234440"/>
+            <a:ext cx="2651760" cy="2194560"/>
           </a:xfrm>
           <a:prstGeom prst="roundRect">
             <a:avLst>
-              <a:gd name="adj" fmla="val 13333"/>
+              <a:gd name="adj" fmla="val 3333"/>
             </a:avLst>
           </a:prstGeom>
           <a:solidFill>
@@ -7678,113 +7955,18 @@
       </p:sp>
       <p:sp>
         <p:nvSpPr>
-          <p:cNvPr id="9" name="Text 7"/>
-          <p:cNvSpPr txBox="1"/>
-          <p:nvPr/>
-        </p:nvSpPr>
-        <p:spPr>
-          <a:xfrm>
-            <a:off x="566928" y="1810512"/>
-            <a:ext cx="365760" cy="548640"/>
-          </a:xfrm>
-          <a:prstGeom prst="rect">
-            <a:avLst/>
-          </a:prstGeom>
-          <a:noFill/>
-          <a:ln/>
-        </p:spPr>
-        <p:txBody>
-          <a:bodyPr wrap="square" lIns="0" tIns="0" rIns="0" bIns="0" rtlCol="0" anchor="ctr"/>
-          <a:lstStyle/>
-          <a:p>
-            <a:pPr indent="0" marL="0">
-              <a:buNone/>
-            </a:pPr>
-            <a:r>
-              <a:rPr lang="en-US" sz="2000" b="1" dirty="0">
-                <a:solidFill>
-                  <a:srgbClr val="003D7A"/>
-                </a:solidFill>
-                <a:latin typeface="Cambria" pitchFamily="34" charset="0"/>
-                <a:ea typeface="Cambria" pitchFamily="34" charset="-122"/>
-                <a:cs typeface="Cambria" pitchFamily="34" charset="-120"/>
-              </a:rPr>
-              <a:t>2</a:t>
-            </a:r>
-            <a:endParaRPr lang="en-US" sz="2000" dirty="0"/>
-          </a:p>
-        </p:txBody>
-      </p:sp>
-      <p:sp>
-        <p:nvSpPr>
-          <p:cNvPr id="10" name="Text 8"/>
-          <p:cNvSpPr txBox="1"/>
-          <p:nvPr/>
-        </p:nvSpPr>
-        <p:spPr>
-          <a:xfrm>
-            <a:off x="960120" y="1810512"/>
-            <a:ext cx="4343400" cy="548640"/>
-          </a:xfrm>
-          <a:prstGeom prst="rect">
-            <a:avLst/>
-          </a:prstGeom>
-          <a:noFill/>
-          <a:ln/>
-        </p:spPr>
-        <p:txBody>
-          <a:bodyPr wrap="square" lIns="0" tIns="0" rIns="0" bIns="0" rtlCol="0" anchor="ctr"/>
-          <a:lstStyle/>
-          <a:p>
-            <a:pPr indent="0" marL="0">
-              <a:buNone/>
-            </a:pPr>
-            <a:r>
-              <a:rPr lang="en-US" sz="1400" b="1" dirty="0">
-                <a:solidFill>
-                  <a:srgbClr val="1F2A37"/>
-                </a:solidFill>
-                <a:latin typeface="Calibri" pitchFamily="34" charset="0"/>
-                <a:ea typeface="Calibri" pitchFamily="34" charset="-122"/>
-                <a:cs typeface="Calibri" pitchFamily="34" charset="-120"/>
-              </a:rPr>
-              <a:t>Проверь реакцию</a:t>
-            </a:r>
-            <a:endParaRPr lang="en-US" sz="1400" dirty="0"/>
-          </a:p>
-          <a:p>
-            <a:pPr indent="0" marL="0">
-              <a:buNone/>
-            </a:pPr>
-            <a:r>
-              <a:rPr lang="en-US" sz="1200" dirty="0">
-                <a:solidFill>
-                  <a:srgbClr val="5B6675"/>
-                </a:solidFill>
-                <a:latin typeface="Calibri" pitchFamily="34" charset="0"/>
-                <a:ea typeface="Calibri" pitchFamily="34" charset="-122"/>
-                <a:cs typeface="Calibri" pitchFamily="34" charset="-120"/>
-              </a:rPr>
-              <a:t>Окликни, аккуратно потряси за плечи</a:t>
-            </a:r>
-            <a:endParaRPr lang="en-US" sz="1400" dirty="0"/>
-          </a:p>
-        </p:txBody>
-      </p:sp>
-      <p:sp>
-        <p:nvSpPr>
-          <p:cNvPr id="11" name="card"/>
+          <p:cNvPr id="7" name="card"/>
           <p:cNvSpPr/>
           <p:nvPr/>
         </p:nvSpPr>
         <p:spPr>
           <a:xfrm>
-            <a:off x="457200" y="2432304"/>
-            <a:ext cx="4937760" cy="548640"/>
+            <a:off x="6035040" y="1234440"/>
+            <a:ext cx="2651760" cy="2194560"/>
           </a:xfrm>
           <a:prstGeom prst="roundRect">
             <a:avLst>
-              <a:gd name="adj" fmla="val 13333"/>
+              <a:gd name="adj" fmla="val 3333"/>
             </a:avLst>
           </a:prstGeom>
           <a:solidFill>
@@ -7800,14 +7982,14 @@
       </p:sp>
       <p:sp>
         <p:nvSpPr>
-          <p:cNvPr id="12" name="Text 10"/>
-          <p:cNvSpPr txBox="1"/>
-          <p:nvPr/>
-        </p:nvSpPr>
-        <p:spPr>
-          <a:xfrm>
-            <a:off x="566928" y="2432304"/>
-            <a:ext cx="365760" cy="548640"/>
+          <p:cNvPr id="8" name="Text 6"/>
+          <p:cNvSpPr txBox="1"/>
+          <p:nvPr/>
+        </p:nvSpPr>
+        <p:spPr>
+          <a:xfrm>
+            <a:off x="548640" y="1463040"/>
+            <a:ext cx="2468880" cy="914400"/>
           </a:xfrm>
           <a:prstGeom prst="rect">
             <a:avLst/>
@@ -7819,21 +8001,177 @@
           <a:bodyPr wrap="square" lIns="0" tIns="0" rIns="0" bIns="0" rtlCol="0" anchor="ctr"/>
           <a:lstStyle/>
           <a:p>
-            <a:pPr indent="0" marL="0">
-              <a:buNone/>
-            </a:pPr>
-            <a:r>
-              <a:rPr lang="en-US" sz="2000" b="1" dirty="0">
-                <a:solidFill>
-                  <a:srgbClr val="003D7A"/>
+            <a:pPr algn="ctr" indent="0" marL="0">
+              <a:buNone/>
+            </a:pPr>
+            <a:r>
+              <a:rPr lang="en-US" sz="4000" b="1" dirty="0">
+                <a:solidFill>
+                  <a:srgbClr val="E53935"/>
                 </a:solidFill>
                 <a:latin typeface="Cambria" pitchFamily="34" charset="0"/>
                 <a:ea typeface="Cambria" pitchFamily="34" charset="-122"/>
                 <a:cs typeface="Cambria" pitchFamily="34" charset="-120"/>
               </a:rPr>
-              <a:t>3</a:t>
-            </a:r>
-            <a:endParaRPr lang="en-US" sz="2000" dirty="0"/>
+              <a:t>30 : 2</a:t>
+            </a:r>
+            <a:endParaRPr lang="en-US" sz="4000" dirty="0"/>
+          </a:p>
+        </p:txBody>
+      </p:sp>
+      <p:sp>
+        <p:nvSpPr>
+          <p:cNvPr id="9" name="Text 7"/>
+          <p:cNvSpPr txBox="1"/>
+          <p:nvPr/>
+        </p:nvSpPr>
+        <p:spPr>
+          <a:xfrm>
+            <a:off x="548640" y="2468880"/>
+            <a:ext cx="2468880" cy="640080"/>
+          </a:xfrm>
+          <a:prstGeom prst="rect">
+            <a:avLst/>
+          </a:prstGeom>
+          <a:noFill/>
+          <a:ln/>
+        </p:spPr>
+        <p:txBody>
+          <a:bodyPr wrap="square" lIns="0" tIns="0" rIns="0" bIns="0" rtlCol="0" anchor="t"/>
+          <a:lstStyle/>
+          <a:p>
+            <a:pPr algn="ctr" indent="0" marL="0">
+              <a:buNone/>
+            </a:pPr>
+            <a:r>
+              <a:rPr lang="en-US" sz="1500" dirty="0">
+                <a:solidFill>
+                  <a:srgbClr val="1F2A37"/>
+                </a:solidFill>
+                <a:latin typeface="Calibri" pitchFamily="34" charset="0"/>
+                <a:ea typeface="Calibri" pitchFamily="34" charset="-122"/>
+                <a:cs typeface="Calibri" pitchFamily="34" charset="-120"/>
+              </a:rPr>
+              <a:t>надавливаний к вдохам</a:t>
+            </a:r>
+            <a:endParaRPr lang="en-US" sz="1500" dirty="0"/>
+          </a:p>
+        </p:txBody>
+      </p:sp>
+      <p:sp>
+        <p:nvSpPr>
+          <p:cNvPr id="10" name="Text 8"/>
+          <p:cNvSpPr txBox="1"/>
+          <p:nvPr/>
+        </p:nvSpPr>
+        <p:spPr>
+          <a:xfrm>
+            <a:off x="3337560" y="1463040"/>
+            <a:ext cx="2468880" cy="914400"/>
+          </a:xfrm>
+          <a:prstGeom prst="rect">
+            <a:avLst/>
+          </a:prstGeom>
+          <a:noFill/>
+          <a:ln/>
+        </p:spPr>
+        <p:txBody>
+          <a:bodyPr wrap="square" lIns="0" tIns="0" rIns="0" bIns="0" rtlCol="0" anchor="ctr"/>
+          <a:lstStyle/>
+          <a:p>
+            <a:pPr algn="ctr" indent="0" marL="0">
+              <a:buNone/>
+            </a:pPr>
+            <a:r>
+              <a:rPr lang="en-US" sz="4000" b="1" dirty="0">
+                <a:solidFill>
+                  <a:srgbClr val="003D7A"/>
+                </a:solidFill>
+                <a:latin typeface="Cambria" pitchFamily="34" charset="0"/>
+                <a:ea typeface="Cambria" pitchFamily="34" charset="-122"/>
+                <a:cs typeface="Cambria" pitchFamily="34" charset="-120"/>
+              </a:rPr>
+              <a:t>100–120</a:t>
+            </a:r>
+            <a:endParaRPr lang="en-US" sz="4000" dirty="0"/>
+          </a:p>
+        </p:txBody>
+      </p:sp>
+      <p:sp>
+        <p:nvSpPr>
+          <p:cNvPr id="11" name="Text 9"/>
+          <p:cNvSpPr txBox="1"/>
+          <p:nvPr/>
+        </p:nvSpPr>
+        <p:spPr>
+          <a:xfrm>
+            <a:off x="3337560" y="2468880"/>
+            <a:ext cx="2468880" cy="640080"/>
+          </a:xfrm>
+          <a:prstGeom prst="rect">
+            <a:avLst/>
+          </a:prstGeom>
+          <a:noFill/>
+          <a:ln/>
+        </p:spPr>
+        <p:txBody>
+          <a:bodyPr wrap="square" lIns="0" tIns="0" rIns="0" bIns="0" rtlCol="0" anchor="t"/>
+          <a:lstStyle/>
+          <a:p>
+            <a:pPr algn="ctr" indent="0" marL="0">
+              <a:buNone/>
+            </a:pPr>
+            <a:r>
+              <a:rPr lang="en-US" sz="1500" dirty="0">
+                <a:solidFill>
+                  <a:srgbClr val="1F2A37"/>
+                </a:solidFill>
+                <a:latin typeface="Calibri" pitchFamily="34" charset="0"/>
+                <a:ea typeface="Calibri" pitchFamily="34" charset="-122"/>
+                <a:cs typeface="Calibri" pitchFamily="34" charset="-120"/>
+              </a:rPr>
+              <a:t>надавливаний в минуту</a:t>
+            </a:r>
+            <a:endParaRPr lang="en-US" sz="1500" dirty="0"/>
+          </a:p>
+        </p:txBody>
+      </p:sp>
+      <p:sp>
+        <p:nvSpPr>
+          <p:cNvPr id="12" name="Text 10"/>
+          <p:cNvSpPr txBox="1"/>
+          <p:nvPr/>
+        </p:nvSpPr>
+        <p:spPr>
+          <a:xfrm>
+            <a:off x="6126480" y="1463040"/>
+            <a:ext cx="2468880" cy="914400"/>
+          </a:xfrm>
+          <a:prstGeom prst="rect">
+            <a:avLst/>
+          </a:prstGeom>
+          <a:noFill/>
+          <a:ln/>
+        </p:spPr>
+        <p:txBody>
+          <a:bodyPr wrap="square" lIns="0" tIns="0" rIns="0" bIns="0" rtlCol="0" anchor="ctr"/>
+          <a:lstStyle/>
+          <a:p>
+            <a:pPr algn="ctr" indent="0" marL="0">
+              <a:buNone/>
+            </a:pPr>
+            <a:r>
+              <a:rPr lang="en-US" sz="3000" b="1" dirty="0">
+                <a:solidFill>
+                  <a:srgbClr val="003D7A"/>
+                </a:solidFill>
+                <a:latin typeface="Cambria" pitchFamily="34" charset="0"/>
+                <a:ea typeface="Cambria" pitchFamily="34" charset="-122"/>
+                <a:cs typeface="Cambria" pitchFamily="34" charset="-120"/>
+              </a:rPr>
+              <a:t>тренажёр</a:t>
+            </a:r>
+            <a:endParaRPr lang="en-US" sz="3000" dirty="0"/>
           </a:p>
         </p:txBody>
       </p:sp>
@@ -7845,8 +8183,47 @@
         </p:nvSpPr>
         <p:spPr>
           <a:xfrm>
-            <a:off x="960120" y="2432304"/>
-            <a:ext cx="4343400" cy="548640"/>
+            <a:off x="6126480" y="2468880"/>
+            <a:ext cx="2468880" cy="640080"/>
+          </a:xfrm>
+          <a:prstGeom prst="rect">
+            <a:avLst/>
+          </a:prstGeom>
+          <a:noFill/>
+          <a:ln/>
+        </p:spPr>
+        <p:txBody>
+          <a:bodyPr wrap="square" lIns="0" tIns="0" rIns="0" bIns="0" rtlCol="0" anchor="t"/>
+          <a:lstStyle/>
+          <a:p>
+            <a:pPr algn="ctr" indent="0" marL="0">
+              <a:buNone/>
+            </a:pPr>
+            <a:r>
+              <a:rPr lang="en-US" sz="1500" dirty="0">
+                <a:solidFill>
+                  <a:srgbClr val="1F2A37"/>
+                </a:solidFill>
+                <a:latin typeface="Calibri" pitchFamily="34" charset="0"/>
+                <a:ea typeface="Calibri" pitchFamily="34" charset="-122"/>
+                <a:cs typeface="Calibri" pitchFamily="34" charset="-120"/>
+              </a:rPr>
+              <a:t>или плотная подушка</a:t>
+            </a:r>
+            <a:endParaRPr lang="en-US" sz="1500" dirty="0"/>
+          </a:p>
+        </p:txBody>
+      </p:sp>
+      <p:sp>
+        <p:nvSpPr>
+          <p:cNvPr id="14" name="Text 12"/>
+          <p:cNvSpPr txBox="1"/>
+          <p:nvPr/>
+        </p:nvSpPr>
+        <p:spPr>
+          <a:xfrm>
+            <a:off x="457200" y="3611880"/>
+            <a:ext cx="8229600" cy="457200"/>
           </a:xfrm>
           <a:prstGeom prst="rect">
             <a:avLst/>
@@ -7862,59 +8239,42 @@
               <a:buNone/>
             </a:pPr>
             <a:r>
-              <a:rPr lang="en-US" sz="1400" b="1" dirty="0">
-                <a:solidFill>
-                  <a:srgbClr val="1F2A37"/>
-                </a:solidFill>
-                <a:latin typeface="Calibri" pitchFamily="34" charset="0"/>
-                <a:ea typeface="Calibri" pitchFamily="34" charset="-122"/>
-                <a:cs typeface="Calibri" pitchFamily="34" charset="-120"/>
-              </a:rPr>
-              <a:t>Освободи дыхательные пути</a:t>
+              <a:rPr lang="en-US" sz="1400" dirty="0">
+                <a:solidFill>
+                  <a:srgbClr val="5B6675"/>
+                </a:solidFill>
+                <a:latin typeface="Calibri" pitchFamily="34" charset="0"/>
+                <a:ea typeface="Calibri" pitchFamily="34" charset="-122"/>
+                <a:cs typeface="Calibri" pitchFamily="34" charset="-120"/>
+              </a:rPr>
+              <a:t>Темп помогает держать метроном или счёт. Работаем парами: один выполняет приём, другой следит за темпом по чек-листу.</a:t>
             </a:r>
             <a:endParaRPr lang="en-US" sz="1400" dirty="0"/>
           </a:p>
-          <a:p>
-            <a:pPr indent="0" marL="0">
-              <a:buNone/>
-            </a:pPr>
-            <a:r>
-              <a:rPr lang="en-US" sz="1200" dirty="0">
-                <a:solidFill>
-                  <a:srgbClr val="5B6675"/>
-                </a:solidFill>
-                <a:latin typeface="Calibri" pitchFamily="34" charset="0"/>
-                <a:ea typeface="Calibri" pitchFamily="34" charset="-122"/>
-                <a:cs typeface="Calibri" pitchFamily="34" charset="-120"/>
-              </a:rPr>
-              <a:t>Запрокинь голову, подними подбородок</a:t>
-            </a:r>
-            <a:endParaRPr lang="en-US" sz="1400" dirty="0"/>
-          </a:p>
-        </p:txBody>
-      </p:sp>
-      <p:sp>
-        <p:nvSpPr>
-          <p:cNvPr id="14" name="card"/>
+        </p:txBody>
+      </p:sp>
+      <p:sp>
+        <p:nvSpPr>
+          <p:cNvPr id="15" name="band"/>
           <p:cNvSpPr/>
           <p:nvPr/>
         </p:nvSpPr>
         <p:spPr>
           <a:xfrm>
-            <a:off x="457200" y="3054096"/>
-            <a:ext cx="4937760" cy="548640"/>
+            <a:off x="457200" y="4160520"/>
+            <a:ext cx="8229600" cy="457200"/>
           </a:xfrm>
           <a:prstGeom prst="roundRect">
             <a:avLst>
-              <a:gd name="adj" fmla="val 13333"/>
+              <a:gd name="adj" fmla="val 12000"/>
             </a:avLst>
           </a:prstGeom>
           <a:solidFill>
-            <a:srgbClr val="F3F6FA"/>
+            <a:srgbClr val="E53935"/>
           </a:solidFill>
-          <a:ln w="9525">
+          <a:ln w="12700">
             <a:solidFill>
-              <a:srgbClr val="DDE3EB"/>
+              <a:srgbClr val="E53935"/>
             </a:solidFill>
             <a:prstDash val="solid"/>
           </a:ln>
@@ -7922,14 +8282,14 @@
       </p:sp>
       <p:sp>
         <p:nvSpPr>
-          <p:cNvPr id="15" name="Text 13"/>
-          <p:cNvSpPr txBox="1"/>
-          <p:nvPr/>
-        </p:nvSpPr>
-        <p:spPr>
-          <a:xfrm>
-            <a:off x="566928" y="3054096"/>
-            <a:ext cx="365760" cy="548640"/>
+          <p:cNvPr id="16" name="Text 14"/>
+          <p:cNvSpPr txBox="1"/>
+          <p:nvPr/>
+        </p:nvSpPr>
+        <p:spPr>
+          <a:xfrm>
+            <a:off x="640080" y="4160520"/>
+            <a:ext cx="7863840" cy="457200"/>
           </a:xfrm>
           <a:prstGeom prst="rect">
             <a:avLst/>
@@ -7945,322 +8305,17 @@
               <a:buNone/>
             </a:pPr>
             <a:r>
-              <a:rPr lang="en-US" sz="2000" b="1" dirty="0">
-                <a:solidFill>
-                  <a:srgbClr val="003D7A"/>
-                </a:solidFill>
-                <a:latin typeface="Cambria" pitchFamily="34" charset="0"/>
-                <a:ea typeface="Cambria" pitchFamily="34" charset="-122"/>
-                <a:cs typeface="Cambria" pitchFamily="34" charset="-120"/>
-              </a:rPr>
-              <a:t>4</a:t>
-            </a:r>
-            <a:endParaRPr lang="en-US" sz="2000" dirty="0"/>
-          </a:p>
-        </p:txBody>
-      </p:sp>
-      <p:sp>
-        <p:nvSpPr>
-          <p:cNvPr id="16" name="Text 14"/>
-          <p:cNvSpPr txBox="1"/>
-          <p:nvPr/>
-        </p:nvSpPr>
-        <p:spPr>
-          <a:xfrm>
-            <a:off x="960120" y="3054096"/>
-            <a:ext cx="4343400" cy="548640"/>
-          </a:xfrm>
-          <a:prstGeom prst="rect">
-            <a:avLst/>
-          </a:prstGeom>
-          <a:noFill/>
-          <a:ln/>
-        </p:spPr>
-        <p:txBody>
-          <a:bodyPr wrap="square" lIns="0" tIns="0" rIns="0" bIns="0" rtlCol="0" anchor="ctr"/>
-          <a:lstStyle/>
-          <a:p>
-            <a:pPr indent="0" marL="0">
-              <a:buNone/>
-            </a:pPr>
-            <a:r>
-              <a:rPr lang="en-US" sz="1400" b="1" dirty="0">
-                <a:solidFill>
-                  <a:srgbClr val="1F2A37"/>
-                </a:solidFill>
-                <a:latin typeface="Calibri" pitchFamily="34" charset="0"/>
-                <a:ea typeface="Calibri" pitchFamily="34" charset="-122"/>
-                <a:cs typeface="Calibri" pitchFamily="34" charset="-120"/>
-              </a:rPr>
-              <a:t>Проверь дыхание</a:t>
-            </a:r>
-            <a:endParaRPr lang="en-US" sz="1400" dirty="0"/>
-          </a:p>
-          <a:p>
-            <a:pPr indent="0" marL="0">
-              <a:buNone/>
-            </a:pPr>
-            <a:r>
-              <a:rPr lang="en-US" sz="1200" dirty="0">
-                <a:solidFill>
-                  <a:srgbClr val="5B6675"/>
-                </a:solidFill>
-                <a:latin typeface="Calibri" pitchFamily="34" charset="0"/>
-                <a:ea typeface="Calibri" pitchFamily="34" charset="-122"/>
-                <a:cs typeface="Calibri" pitchFamily="34" charset="-120"/>
-              </a:rPr>
-              <a:t>Смотрю, слушаю, ощущаю — не более 10 секунд</a:t>
-            </a:r>
-            <a:endParaRPr lang="en-US" sz="1400" dirty="0"/>
-          </a:p>
-        </p:txBody>
-      </p:sp>
-      <p:sp>
-        <p:nvSpPr>
-          <p:cNvPr id="17" name="card"/>
-          <p:cNvSpPr/>
-          <p:nvPr/>
-        </p:nvSpPr>
-        <p:spPr>
-          <a:xfrm>
-            <a:off x="5669280" y="1188720"/>
-            <a:ext cx="3017520" cy="1371600"/>
-          </a:xfrm>
-          <a:prstGeom prst="roundRect">
-            <a:avLst>
-              <a:gd name="adj" fmla="val 5333"/>
-            </a:avLst>
-          </a:prstGeom>
-          <a:solidFill>
-            <a:srgbClr val="F3F6FA"/>
-          </a:solidFill>
-          <a:ln w="9525">
-            <a:solidFill>
-              <a:srgbClr val="DDE3EB"/>
-            </a:solidFill>
-            <a:prstDash val="solid"/>
-          </a:ln>
-        </p:spPr>
-      </p:sp>
-      <p:sp>
-        <p:nvSpPr>
-          <p:cNvPr id="18" name="card"/>
-          <p:cNvSpPr/>
-          <p:nvPr/>
-        </p:nvSpPr>
-        <p:spPr>
-          <a:xfrm>
-            <a:off x="5669280" y="2697480"/>
-            <a:ext cx="3017520" cy="1371600"/>
-          </a:xfrm>
-          <a:prstGeom prst="roundRect">
-            <a:avLst>
-              <a:gd name="adj" fmla="val 5333"/>
-            </a:avLst>
-          </a:prstGeom>
-          <a:solidFill>
-            <a:srgbClr val="F3F6FA"/>
-          </a:solidFill>
-          <a:ln w="9525">
-            <a:solidFill>
-              <a:srgbClr val="DDE3EB"/>
-            </a:solidFill>
-            <a:prstDash val="solid"/>
-          </a:ln>
-        </p:spPr>
-      </p:sp>
-      <p:sp>
-        <p:nvSpPr>
-          <p:cNvPr id="19" name="Text 17"/>
-          <p:cNvSpPr txBox="1"/>
-          <p:nvPr/>
-        </p:nvSpPr>
-        <p:spPr>
-          <a:xfrm>
-            <a:off x="5806440" y="1261872"/>
-            <a:ext cx="2743200" cy="320040"/>
-          </a:xfrm>
-          <a:prstGeom prst="rect">
-            <a:avLst/>
-          </a:prstGeom>
-          <a:noFill/>
-          <a:ln/>
-        </p:spPr>
-        <p:txBody>
-          <a:bodyPr wrap="square" lIns="0" tIns="0" rIns="0" bIns="0" rtlCol="0" anchor="ctr"/>
-          <a:lstStyle/>
-          <a:p>
-            <a:pPr indent="0" marL="0">
-              <a:buNone/>
-            </a:pPr>
-            <a:r>
               <a:rPr lang="en-US" sz="1500" b="1" dirty="0">
                 <a:solidFill>
-                  <a:srgbClr val="003D7A"/>
-                </a:solidFill>
-                <a:latin typeface="Calibri" pitchFamily="34" charset="0"/>
-                <a:ea typeface="Calibri" pitchFamily="34" charset="-122"/>
-                <a:cs typeface="Calibri" pitchFamily="34" charset="-120"/>
-              </a:rPr>
-              <a:t>Дыхание есть</a:t>
+                  <a:srgbClr val="FFFFFF"/>
+                </a:solidFill>
+                <a:latin typeface="Calibri" pitchFamily="34" charset="0"/>
+                <a:ea typeface="Calibri" pitchFamily="34" charset="-122"/>
+                <a:cs typeface="Calibri" pitchFamily="34" charset="-120"/>
+              </a:rPr>
+              <a:t>Реанимацию отрабатываем только на тренажёре</a:t>
             </a:r>
             <a:endParaRPr lang="en-US" sz="1500" dirty="0"/>
-          </a:p>
-        </p:txBody>
-      </p:sp>
-      <p:sp>
-        <p:nvSpPr>
-          <p:cNvPr id="20" name="Text 18"/>
-          <p:cNvSpPr txBox="1"/>
-          <p:nvPr/>
-        </p:nvSpPr>
-        <p:spPr>
-          <a:xfrm>
-            <a:off x="5806440" y="1627632"/>
-            <a:ext cx="2743200" cy="868680"/>
-          </a:xfrm>
-          <a:prstGeom prst="rect">
-            <a:avLst/>
-          </a:prstGeom>
-          <a:noFill/>
-          <a:ln/>
-        </p:spPr>
-        <p:txBody>
-          <a:bodyPr wrap="square" lIns="0" tIns="0" rIns="0" bIns="0" rtlCol="0" anchor="t"/>
-          <a:lstStyle/>
-          <a:p>
-            <a:pPr indent="0" marL="0">
-              <a:buNone/>
-            </a:pPr>
-            <a:r>
-              <a:rPr lang="en-US" sz="1300" dirty="0">
-                <a:solidFill>
-                  <a:srgbClr val="1F2A37"/>
-                </a:solidFill>
-                <a:latin typeface="Calibri" pitchFamily="34" charset="0"/>
-                <a:ea typeface="Calibri" pitchFamily="34" charset="-122"/>
-                <a:cs typeface="Calibri" pitchFamily="34" charset="-120"/>
-              </a:rPr>
-              <a:t>Устойчивое боковое положение, наблюдение, вызов помощи</a:t>
-            </a:r>
-            <a:endParaRPr lang="en-US" sz="1300" dirty="0"/>
-          </a:p>
-        </p:txBody>
-      </p:sp>
-      <p:sp>
-        <p:nvSpPr>
-          <p:cNvPr id="21" name="Text 19"/>
-          <p:cNvSpPr txBox="1"/>
-          <p:nvPr/>
-        </p:nvSpPr>
-        <p:spPr>
-          <a:xfrm>
-            <a:off x="5806440" y="2770632"/>
-            <a:ext cx="2743200" cy="320040"/>
-          </a:xfrm>
-          <a:prstGeom prst="rect">
-            <a:avLst/>
-          </a:prstGeom>
-          <a:noFill/>
-          <a:ln/>
-        </p:spPr>
-        <p:txBody>
-          <a:bodyPr wrap="square" lIns="0" tIns="0" rIns="0" bIns="0" rtlCol="0" anchor="ctr"/>
-          <a:lstStyle/>
-          <a:p>
-            <a:pPr indent="0" marL="0">
-              <a:buNone/>
-            </a:pPr>
-            <a:r>
-              <a:rPr lang="en-US" sz="1500" b="1" dirty="0">
-                <a:solidFill>
-                  <a:srgbClr val="E53935"/>
-                </a:solidFill>
-                <a:latin typeface="Calibri" pitchFamily="34" charset="0"/>
-                <a:ea typeface="Calibri" pitchFamily="34" charset="-122"/>
-                <a:cs typeface="Calibri" pitchFamily="34" charset="-120"/>
-              </a:rPr>
-              <a:t>Дыхания нет</a:t>
-            </a:r>
-            <a:endParaRPr lang="en-US" sz="1500" dirty="0"/>
-          </a:p>
-        </p:txBody>
-      </p:sp>
-      <p:sp>
-        <p:nvSpPr>
-          <p:cNvPr id="22" name="Text 20"/>
-          <p:cNvSpPr txBox="1"/>
-          <p:nvPr/>
-        </p:nvSpPr>
-        <p:spPr>
-          <a:xfrm>
-            <a:off x="5806440" y="3136392"/>
-            <a:ext cx="2743200" cy="868680"/>
-          </a:xfrm>
-          <a:prstGeom prst="rect">
-            <a:avLst/>
-          </a:prstGeom>
-          <a:noFill/>
-          <a:ln/>
-        </p:spPr>
-        <p:txBody>
-          <a:bodyPr wrap="square" lIns="0" tIns="0" rIns="0" bIns="0" rtlCol="0" anchor="t"/>
-          <a:lstStyle/>
-          <a:p>
-            <a:pPr indent="0" marL="0">
-              <a:buNone/>
-            </a:pPr>
-            <a:r>
-              <a:rPr lang="en-US" sz="1300" dirty="0">
-                <a:solidFill>
-                  <a:srgbClr val="1F2A37"/>
-                </a:solidFill>
-                <a:latin typeface="Calibri" pitchFamily="34" charset="0"/>
-                <a:ea typeface="Calibri" pitchFamily="34" charset="-122"/>
-                <a:cs typeface="Calibri" pitchFamily="34" charset="-120"/>
-              </a:rPr>
-              <a:t>Вызов помощи и начало реанимации: 30 : 2</a:t>
-            </a:r>
-            <a:endParaRPr lang="en-US" sz="1300" dirty="0"/>
-          </a:p>
-        </p:txBody>
-      </p:sp>
-      <p:sp>
-        <p:nvSpPr>
-          <p:cNvPr id="23" name="Text 21"/>
-          <p:cNvSpPr txBox="1"/>
-          <p:nvPr/>
-        </p:nvSpPr>
-        <p:spPr>
-          <a:xfrm>
-            <a:off x="457200" y="4206240"/>
-            <a:ext cx="8229600" cy="365760"/>
-          </a:xfrm>
-          <a:prstGeom prst="rect">
-            <a:avLst/>
-          </a:prstGeom>
-          <a:noFill/>
-          <a:ln/>
-        </p:spPr>
-        <p:txBody>
-          <a:bodyPr wrap="square" lIns="0" tIns="0" rIns="0" bIns="0" rtlCol="0" anchor="ctr"/>
-          <a:lstStyle/>
-          <a:p>
-            <a:pPr indent="0" marL="0">
-              <a:buNone/>
-            </a:pPr>
-            <a:r>
-              <a:rPr lang="en-US" sz="1400" b="1" dirty="0">
-                <a:solidFill>
-                  <a:srgbClr val="E53935"/>
-                </a:solidFill>
-                <a:latin typeface="Calibri" pitchFamily="34" charset="0"/>
-                <a:ea typeface="Calibri" pitchFamily="34" charset="-122"/>
-                <a:cs typeface="Calibri" pitchFamily="34" charset="-120"/>
-              </a:rPr>
-              <a:t>Реанимацию отрабатываем только на тренажёре</a:t>
-            </a:r>
-            <a:endParaRPr lang="en-US" sz="1400" dirty="0"/>
           </a:p>
         </p:txBody>
       </p:sp>
@@ -8329,7 +8384,7 @@
                 <a:ea typeface="Cambria" pitchFamily="34" charset="-122"/>
                 <a:cs typeface="Cambria" pitchFamily="34" charset="-120"/>
               </a:rPr>
-              <a:t>Сердечно-лёгочная реанимация</a:t>
+              <a:t>Станция 2. «Кровотечение»</a:t>
             </a:r>
             <a:endParaRPr lang="en-US" sz="3400" dirty="0"/>
           </a:p>
@@ -8422,11 +8477,11 @@
         <p:spPr>
           <a:xfrm>
             <a:off x="457200" y="1234440"/>
-            <a:ext cx="2651760" cy="2194560"/>
+            <a:ext cx="3840480" cy="2926080"/>
           </a:xfrm>
           <a:prstGeom prst="roundRect">
             <a:avLst>
-              <a:gd name="adj" fmla="val 3333"/>
+              <a:gd name="adj" fmla="val 2500"/>
             </a:avLst>
           </a:prstGeom>
           <a:solidFill>
@@ -8448,12 +8503,12 @@
         </p:nvSpPr>
         <p:spPr>
           <a:xfrm>
-            <a:off x="3246120" y="1234440"/>
-            <a:ext cx="2651760" cy="2194560"/>
+            <a:off x="4572000" y="1234440"/>
+            <a:ext cx="4114800" cy="2926080"/>
           </a:xfrm>
           <a:prstGeom prst="roundRect">
             <a:avLst>
-              <a:gd name="adj" fmla="val 3333"/>
+              <a:gd name="adj" fmla="val 2500"/>
             </a:avLst>
           </a:prstGeom>
           <a:solidFill>
@@ -8469,319 +8524,17 @@
       </p:sp>
       <p:sp>
         <p:nvSpPr>
-          <p:cNvPr id="7" name="card"/>
+          <p:cNvPr id="7" name="st1-icon-bg"/>
           <p:cNvSpPr/>
           <p:nvPr/>
         </p:nvSpPr>
         <p:spPr>
           <a:xfrm>
-            <a:off x="6035040" y="1234440"/>
-            <a:ext cx="2651760" cy="2194560"/>
-          </a:xfrm>
-          <a:prstGeom prst="roundRect">
-            <a:avLst>
-              <a:gd name="adj" fmla="val 3333"/>
-            </a:avLst>
-          </a:prstGeom>
-          <a:solidFill>
-            <a:srgbClr val="F3F6FA"/>
-          </a:solidFill>
-          <a:ln w="9525">
-            <a:solidFill>
-              <a:srgbClr val="DDE3EB"/>
-            </a:solidFill>
-            <a:prstDash val="solid"/>
-          </a:ln>
-        </p:spPr>
-      </p:sp>
-      <p:sp>
-        <p:nvSpPr>
-          <p:cNvPr id="8" name="Text 6"/>
-          <p:cNvSpPr txBox="1"/>
-          <p:nvPr/>
-        </p:nvSpPr>
-        <p:spPr>
-          <a:xfrm>
-            <a:off x="548640" y="1463040"/>
-            <a:ext cx="2468880" cy="914400"/>
-          </a:xfrm>
-          <a:prstGeom prst="rect">
-            <a:avLst/>
-          </a:prstGeom>
-          <a:noFill/>
-          <a:ln/>
-        </p:spPr>
-        <p:txBody>
-          <a:bodyPr wrap="square" lIns="0" tIns="0" rIns="0" bIns="0" rtlCol="0" anchor="ctr"/>
-          <a:lstStyle/>
-          <a:p>
-            <a:pPr algn="ctr" indent="0" marL="0">
-              <a:buNone/>
-            </a:pPr>
-            <a:r>
-              <a:rPr lang="en-US" sz="4000" b="1" dirty="0">
-                <a:solidFill>
-                  <a:srgbClr val="E53935"/>
-                </a:solidFill>
-                <a:latin typeface="Cambria" pitchFamily="34" charset="0"/>
-                <a:ea typeface="Cambria" pitchFamily="34" charset="-122"/>
-                <a:cs typeface="Cambria" pitchFamily="34" charset="-120"/>
-              </a:rPr>
-              <a:t>30 : 2</a:t>
-            </a:r>
-            <a:endParaRPr lang="en-US" sz="4000" dirty="0"/>
-          </a:p>
-        </p:txBody>
-      </p:sp>
-      <p:sp>
-        <p:nvSpPr>
-          <p:cNvPr id="9" name="Text 7"/>
-          <p:cNvSpPr txBox="1"/>
-          <p:nvPr/>
-        </p:nvSpPr>
-        <p:spPr>
-          <a:xfrm>
-            <a:off x="548640" y="2468880"/>
-            <a:ext cx="2468880" cy="640080"/>
-          </a:xfrm>
-          <a:prstGeom prst="rect">
-            <a:avLst/>
-          </a:prstGeom>
-          <a:noFill/>
-          <a:ln/>
-        </p:spPr>
-        <p:txBody>
-          <a:bodyPr wrap="square" lIns="0" tIns="0" rIns="0" bIns="0" rtlCol="0" anchor="t"/>
-          <a:lstStyle/>
-          <a:p>
-            <a:pPr algn="ctr" indent="0" marL="0">
-              <a:buNone/>
-            </a:pPr>
-            <a:r>
-              <a:rPr lang="en-US" sz="1500" dirty="0">
-                <a:solidFill>
-                  <a:srgbClr val="1F2A37"/>
-                </a:solidFill>
-                <a:latin typeface="Calibri" pitchFamily="34" charset="0"/>
-                <a:ea typeface="Calibri" pitchFamily="34" charset="-122"/>
-                <a:cs typeface="Calibri" pitchFamily="34" charset="-120"/>
-              </a:rPr>
-              <a:t>надавливаний к вдохам</a:t>
-            </a:r>
-            <a:endParaRPr lang="en-US" sz="1500" dirty="0"/>
-          </a:p>
-        </p:txBody>
-      </p:sp>
-      <p:sp>
-        <p:nvSpPr>
-          <p:cNvPr id="10" name="Text 8"/>
-          <p:cNvSpPr txBox="1"/>
-          <p:nvPr/>
-        </p:nvSpPr>
-        <p:spPr>
-          <a:xfrm>
-            <a:off x="3337560" y="1463040"/>
-            <a:ext cx="2468880" cy="914400"/>
-          </a:xfrm>
-          <a:prstGeom prst="rect">
-            <a:avLst/>
-          </a:prstGeom>
-          <a:noFill/>
-          <a:ln/>
-        </p:spPr>
-        <p:txBody>
-          <a:bodyPr wrap="square" lIns="0" tIns="0" rIns="0" bIns="0" rtlCol="0" anchor="ctr"/>
-          <a:lstStyle/>
-          <a:p>
-            <a:pPr algn="ctr" indent="0" marL="0">
-              <a:buNone/>
-            </a:pPr>
-            <a:r>
-              <a:rPr lang="en-US" sz="4000" b="1" dirty="0">
-                <a:solidFill>
-                  <a:srgbClr val="003D7A"/>
-                </a:solidFill>
-                <a:latin typeface="Cambria" pitchFamily="34" charset="0"/>
-                <a:ea typeface="Cambria" pitchFamily="34" charset="-122"/>
-                <a:cs typeface="Cambria" pitchFamily="34" charset="-120"/>
-              </a:rPr>
-              <a:t>100–120</a:t>
-            </a:r>
-            <a:endParaRPr lang="en-US" sz="4000" dirty="0"/>
-          </a:p>
-        </p:txBody>
-      </p:sp>
-      <p:sp>
-        <p:nvSpPr>
-          <p:cNvPr id="11" name="Text 9"/>
-          <p:cNvSpPr txBox="1"/>
-          <p:nvPr/>
-        </p:nvSpPr>
-        <p:spPr>
-          <a:xfrm>
-            <a:off x="3337560" y="2468880"/>
-            <a:ext cx="2468880" cy="640080"/>
-          </a:xfrm>
-          <a:prstGeom prst="rect">
-            <a:avLst/>
-          </a:prstGeom>
-          <a:noFill/>
-          <a:ln/>
-        </p:spPr>
-        <p:txBody>
-          <a:bodyPr wrap="square" lIns="0" tIns="0" rIns="0" bIns="0" rtlCol="0" anchor="t"/>
-          <a:lstStyle/>
-          <a:p>
-            <a:pPr algn="ctr" indent="0" marL="0">
-              <a:buNone/>
-            </a:pPr>
-            <a:r>
-              <a:rPr lang="en-US" sz="1500" dirty="0">
-                <a:solidFill>
-                  <a:srgbClr val="1F2A37"/>
-                </a:solidFill>
-                <a:latin typeface="Calibri" pitchFamily="34" charset="0"/>
-                <a:ea typeface="Calibri" pitchFamily="34" charset="-122"/>
-                <a:cs typeface="Calibri" pitchFamily="34" charset="-120"/>
-              </a:rPr>
-              <a:t>надавливаний в минуту</a:t>
-            </a:r>
-            <a:endParaRPr lang="en-US" sz="1500" dirty="0"/>
-          </a:p>
-        </p:txBody>
-      </p:sp>
-      <p:sp>
-        <p:nvSpPr>
-          <p:cNvPr id="12" name="Text 10"/>
-          <p:cNvSpPr txBox="1"/>
-          <p:nvPr/>
-        </p:nvSpPr>
-        <p:spPr>
-          <a:xfrm>
-            <a:off x="6126480" y="1463040"/>
-            <a:ext cx="2468880" cy="914400"/>
-          </a:xfrm>
-          <a:prstGeom prst="rect">
-            <a:avLst/>
-          </a:prstGeom>
-          <a:noFill/>
-          <a:ln/>
-        </p:spPr>
-        <p:txBody>
-          <a:bodyPr wrap="square" lIns="0" tIns="0" rIns="0" bIns="0" rtlCol="0" anchor="ctr"/>
-          <a:lstStyle/>
-          <a:p>
-            <a:pPr algn="ctr" indent="0" marL="0">
-              <a:buNone/>
-            </a:pPr>
-            <a:r>
-              <a:rPr lang="en-US" sz="3000" b="1" dirty="0">
-                <a:solidFill>
-                  <a:srgbClr val="003D7A"/>
-                </a:solidFill>
-                <a:latin typeface="Cambria" pitchFamily="34" charset="0"/>
-                <a:ea typeface="Cambria" pitchFamily="34" charset="-122"/>
-                <a:cs typeface="Cambria" pitchFamily="34" charset="-120"/>
-              </a:rPr>
-              <a:t>тренажёр</a:t>
-            </a:r>
-            <a:endParaRPr lang="en-US" sz="3000" dirty="0"/>
-          </a:p>
-        </p:txBody>
-      </p:sp>
-      <p:sp>
-        <p:nvSpPr>
-          <p:cNvPr id="13" name="Text 11"/>
-          <p:cNvSpPr txBox="1"/>
-          <p:nvPr/>
-        </p:nvSpPr>
-        <p:spPr>
-          <a:xfrm>
-            <a:off x="6126480" y="2468880"/>
-            <a:ext cx="2468880" cy="640080"/>
-          </a:xfrm>
-          <a:prstGeom prst="rect">
-            <a:avLst/>
-          </a:prstGeom>
-          <a:noFill/>
-          <a:ln/>
-        </p:spPr>
-        <p:txBody>
-          <a:bodyPr wrap="square" lIns="0" tIns="0" rIns="0" bIns="0" rtlCol="0" anchor="t"/>
-          <a:lstStyle/>
-          <a:p>
-            <a:pPr algn="ctr" indent="0" marL="0">
-              <a:buNone/>
-            </a:pPr>
-            <a:r>
-              <a:rPr lang="en-US" sz="1500" dirty="0">
-                <a:solidFill>
-                  <a:srgbClr val="1F2A37"/>
-                </a:solidFill>
-                <a:latin typeface="Calibri" pitchFamily="34" charset="0"/>
-                <a:ea typeface="Calibri" pitchFamily="34" charset="-122"/>
-                <a:cs typeface="Calibri" pitchFamily="34" charset="-120"/>
-              </a:rPr>
-              <a:t>или плотная подушка</a:t>
-            </a:r>
-            <a:endParaRPr lang="en-US" sz="1500" dirty="0"/>
-          </a:p>
-        </p:txBody>
-      </p:sp>
-      <p:sp>
-        <p:nvSpPr>
-          <p:cNvPr id="14" name="Text 12"/>
-          <p:cNvSpPr txBox="1"/>
-          <p:nvPr/>
-        </p:nvSpPr>
-        <p:spPr>
-          <a:xfrm>
-            <a:off x="457200" y="3611880"/>
-            <a:ext cx="8229600" cy="457200"/>
-          </a:xfrm>
-          <a:prstGeom prst="rect">
-            <a:avLst/>
-          </a:prstGeom>
-          <a:noFill/>
-          <a:ln/>
-        </p:spPr>
-        <p:txBody>
-          <a:bodyPr wrap="square" lIns="0" tIns="0" rIns="0" bIns="0" rtlCol="0" anchor="ctr"/>
-          <a:lstStyle/>
-          <a:p>
-            <a:pPr indent="0" marL="0">
-              <a:buNone/>
-            </a:pPr>
-            <a:r>
-              <a:rPr lang="en-US" sz="1400" dirty="0">
-                <a:solidFill>
-                  <a:srgbClr val="5B6675"/>
-                </a:solidFill>
-                <a:latin typeface="Calibri" pitchFamily="34" charset="0"/>
-                <a:ea typeface="Calibri" pitchFamily="34" charset="-122"/>
-                <a:cs typeface="Calibri" pitchFamily="34" charset="-120"/>
-              </a:rPr>
-              <a:t>Темп помогает держать метроном или счёт. Работаем парами: один выполняет приём, другой следит за темпом по чек-листу.</a:t>
-            </a:r>
-            <a:endParaRPr lang="en-US" sz="1400" dirty="0"/>
-          </a:p>
-        </p:txBody>
-      </p:sp>
-      <p:sp>
-        <p:nvSpPr>
-          <p:cNvPr id="15" name="band"/>
-          <p:cNvSpPr/>
-          <p:nvPr/>
-        </p:nvSpPr>
-        <p:spPr>
-          <a:xfrm>
-            <a:off x="457200" y="4160520"/>
-            <a:ext cx="8229600" cy="457200"/>
-          </a:xfrm>
-          <a:prstGeom prst="roundRect">
-            <a:avLst>
-              <a:gd name="adj" fmla="val 12000"/>
-            </a:avLst>
+            <a:off x="640080" y="1417320"/>
+            <a:ext cx="640080" cy="640080"/>
+          </a:xfrm>
+          <a:prstGeom prst="ellipse">
+            <a:avLst/>
           </a:prstGeom>
           <a:solidFill>
             <a:srgbClr val="E53935"/>
@@ -8794,16 +8547,40 @@
           </a:ln>
         </p:spPr>
       </p:sp>
-      <p:sp>
-        <p:nvSpPr>
-          <p:cNvPr id="16" name="Text 14"/>
-          <p:cNvSpPr txBox="1"/>
-          <p:nvPr/>
-        </p:nvSpPr>
-        <p:spPr>
-          <a:xfrm>
-            <a:off x="640080" y="4160520"/>
-            <a:ext cx="7863840" cy="457200"/>
+      <p:pic>
+        <p:nvPicPr>
+          <p:cNvPr id="8" name="st1-icon" descr="preencoded.png">    </p:cNvPr>
+          <p:cNvPicPr>
+            <a:picLocks noChangeAspect="1"/>
+          </p:cNvPicPr>
+          <p:nvPr/>
+        </p:nvPicPr>
+        <p:blipFill>
+          <a:blip r:embed="rId1"/>
+          <a:stretch>
+            <a:fillRect/>
+          </a:stretch>
+        </p:blipFill>
+        <p:spPr>
+          <a:xfrm>
+            <a:off x="806501" y="1583741"/>
+            <a:ext cx="307238" cy="307238"/>
+          </a:xfrm>
+          <a:prstGeom prst="rect">
+            <a:avLst/>
+          </a:prstGeom>
+        </p:spPr>
+      </p:pic>
+      <p:sp>
+        <p:nvSpPr>
+          <p:cNvPr id="9" name="Text 6"/>
+          <p:cNvSpPr txBox="1"/>
+          <p:nvPr/>
+        </p:nvSpPr>
+        <p:spPr>
+          <a:xfrm>
+            <a:off x="1417320" y="1463040"/>
+            <a:ext cx="2743200" cy="365760"/>
           </a:xfrm>
           <a:prstGeom prst="rect">
             <a:avLst/>
@@ -8819,17 +8596,240 @@
               <a:buNone/>
             </a:pPr>
             <a:r>
-              <a:rPr lang="en-US" sz="1500" b="1" dirty="0">
-                <a:solidFill>
-                  <a:srgbClr val="FFFFFF"/>
-                </a:solidFill>
-                <a:latin typeface="Calibri" pitchFamily="34" charset="0"/>
-                <a:ea typeface="Calibri" pitchFamily="34" charset="-122"/>
-                <a:cs typeface="Calibri" pitchFamily="34" charset="-120"/>
-              </a:rPr>
-              <a:t>Реанимацию отрабатываем только на тренажёре</a:t>
-            </a:r>
-            <a:endParaRPr lang="en-US" sz="1500" dirty="0"/>
+              <a:rPr lang="en-US" sz="1800" b="1" dirty="0">
+                <a:solidFill>
+                  <a:srgbClr val="003D7A"/>
+                </a:solidFill>
+                <a:latin typeface="Calibri" pitchFamily="34" charset="0"/>
+                <a:ea typeface="Calibri" pitchFamily="34" charset="-122"/>
+                <a:cs typeface="Calibri" pitchFamily="34" charset="-120"/>
+              </a:rPr>
+              <a:t>Ситуация</a:t>
+            </a:r>
+            <a:endParaRPr lang="en-US" sz="1800" dirty="0"/>
+          </a:p>
+        </p:txBody>
+      </p:sp>
+      <p:sp>
+        <p:nvSpPr>
+          <p:cNvPr id="10" name="Text 7"/>
+          <p:cNvSpPr txBox="1"/>
+          <p:nvPr/>
+        </p:nvSpPr>
+        <p:spPr>
+          <a:xfrm>
+            <a:off x="640080" y="2194560"/>
+            <a:ext cx="3474720" cy="914400"/>
+          </a:xfrm>
+          <a:prstGeom prst="rect">
+            <a:avLst/>
+          </a:prstGeom>
+          <a:noFill/>
+          <a:ln/>
+        </p:spPr>
+        <p:txBody>
+          <a:bodyPr wrap="square" lIns="0" tIns="0" rIns="0" bIns="0" rtlCol="0" anchor="t"/>
+          <a:lstStyle/>
+          <a:p>
+            <a:pPr indent="0" marL="0">
+              <a:buNone/>
+            </a:pPr>
+            <a:r>
+              <a:rPr lang="en-US" sz="1600" dirty="0">
+                <a:solidFill>
+                  <a:srgbClr val="1F2A37"/>
+                </a:solidFill>
+                <a:latin typeface="Calibri" pitchFamily="34" charset="0"/>
+                <a:ea typeface="Calibri" pitchFamily="34" charset="-122"/>
+                <a:cs typeface="Calibri" pitchFamily="34" charset="-120"/>
+              </a:rPr>
+              <a:t>Рана предплечья, кровь бьёт струёй.</a:t>
+            </a:r>
+            <a:endParaRPr lang="en-US" sz="1600" dirty="0"/>
+          </a:p>
+        </p:txBody>
+      </p:sp>
+      <p:sp>
+        <p:nvSpPr>
+          <p:cNvPr id="11" name="Text 8"/>
+          <p:cNvSpPr txBox="1"/>
+          <p:nvPr/>
+        </p:nvSpPr>
+        <p:spPr>
+          <a:xfrm>
+            <a:off x="640080" y="3200400"/>
+            <a:ext cx="3474720" cy="822960"/>
+          </a:xfrm>
+          <a:prstGeom prst="rect">
+            <a:avLst/>
+          </a:prstGeom>
+          <a:noFill/>
+          <a:ln/>
+        </p:spPr>
+        <p:txBody>
+          <a:bodyPr wrap="square" lIns="0" tIns="0" rIns="0" bIns="0" rtlCol="0" anchor="t"/>
+          <a:lstStyle/>
+          <a:p>
+            <a:pPr indent="0" marL="0">
+              <a:buNone/>
+            </a:pPr>
+            <a:r>
+              <a:rPr lang="en-US" sz="1400" dirty="0">
+                <a:solidFill>
+                  <a:srgbClr val="5B6675"/>
+                </a:solidFill>
+                <a:latin typeface="Calibri" pitchFamily="34" charset="0"/>
+                <a:ea typeface="Calibri" pitchFamily="34" charset="-122"/>
+                <a:cs typeface="Calibri" pitchFamily="34" charset="-120"/>
+              </a:rPr>
+              <a:t>Время наложения жгута нужно зафиксировать.</a:t>
+            </a:r>
+            <a:endParaRPr lang="en-US" sz="1400" dirty="0"/>
+          </a:p>
+        </p:txBody>
+      </p:sp>
+      <p:sp>
+        <p:nvSpPr>
+          <p:cNvPr id="12" name="Text 9"/>
+          <p:cNvSpPr txBox="1"/>
+          <p:nvPr/>
+        </p:nvSpPr>
+        <p:spPr>
+          <a:xfrm>
+            <a:off x="4754880" y="1417320"/>
+            <a:ext cx="3657600" cy="365760"/>
+          </a:xfrm>
+          <a:prstGeom prst="rect">
+            <a:avLst/>
+          </a:prstGeom>
+          <a:noFill/>
+          <a:ln/>
+        </p:spPr>
+        <p:txBody>
+          <a:bodyPr wrap="square" lIns="0" tIns="0" rIns="0" bIns="0" rtlCol="0" anchor="ctr"/>
+          <a:lstStyle/>
+          <a:p>
+            <a:pPr indent="0" marL="0">
+              <a:buNone/>
+            </a:pPr>
+            <a:r>
+              <a:rPr lang="en-US" sz="1800" b="1" dirty="0">
+                <a:solidFill>
+                  <a:srgbClr val="003D7A"/>
+                </a:solidFill>
+                <a:latin typeface="Calibri" pitchFamily="34" charset="0"/>
+                <a:ea typeface="Calibri" pitchFamily="34" charset="-122"/>
+                <a:cs typeface="Calibri" pitchFamily="34" charset="-120"/>
+              </a:rPr>
+              <a:t>Что делаем</a:t>
+            </a:r>
+            <a:endParaRPr lang="en-US" sz="1800" dirty="0"/>
+          </a:p>
+        </p:txBody>
+      </p:sp>
+      <p:sp>
+        <p:nvSpPr>
+          <p:cNvPr id="13" name="Text 10"/>
+          <p:cNvSpPr txBox="1"/>
+          <p:nvPr/>
+        </p:nvSpPr>
+        <p:spPr>
+          <a:xfrm>
+            <a:off x="4754880" y="1920240"/>
+            <a:ext cx="3749040" cy="2103120"/>
+          </a:xfrm>
+          <a:prstGeom prst="rect">
+            <a:avLst/>
+          </a:prstGeom>
+          <a:noFill/>
+          <a:ln/>
+        </p:spPr>
+        <p:txBody>
+          <a:bodyPr wrap="square" lIns="0" tIns="0" rIns="0" bIns="0" rtlCol="0" anchor="t"/>
+          <a:lstStyle/>
+          <a:p>
+            <a:pPr marL="342900" indent="-342900">
+              <a:spcAft>
+                <a:spcPts val="800"/>
+              </a:spcAft>
+              <a:buSzPct val="100000"/>
+              <a:buChar char="•"/>
+            </a:pPr>
+            <a:r>
+              <a:rPr lang="en-US" sz="1600" dirty="0">
+                <a:solidFill>
+                  <a:srgbClr val="1F2A37"/>
+                </a:solidFill>
+                <a:latin typeface="Calibri" pitchFamily="34" charset="0"/>
+                <a:ea typeface="Calibri" pitchFamily="34" charset="-122"/>
+                <a:cs typeface="Calibri" pitchFamily="34" charset="-120"/>
+              </a:rPr>
+              <a:t>Прямое давление на рану</a:t>
+            </a:r>
+            <a:endParaRPr lang="en-US" sz="1600" dirty="0"/>
+          </a:p>
+          <a:p>
+            <a:pPr marL="342900" indent="-342900">
+              <a:spcAft>
+                <a:spcPts val="800"/>
+              </a:spcAft>
+              <a:buSzPct val="100000"/>
+              <a:buChar char="•"/>
+            </a:pPr>
+            <a:r>
+              <a:rPr lang="en-US" sz="1600" dirty="0">
+                <a:solidFill>
+                  <a:srgbClr val="1F2A37"/>
+                </a:solidFill>
+                <a:latin typeface="Calibri" pitchFamily="34" charset="0"/>
+                <a:ea typeface="Calibri" pitchFamily="34" charset="-122"/>
+                <a:cs typeface="Calibri" pitchFamily="34" charset="-120"/>
+              </a:rPr>
+              <a:t>Давящая повязка</a:t>
+            </a:r>
+            <a:endParaRPr lang="en-US" sz="1600" dirty="0"/>
+          </a:p>
+          <a:p>
+            <a:pPr marL="342900" indent="-342900">
+              <a:spcAft>
+                <a:spcPts val="800"/>
+              </a:spcAft>
+              <a:buSzPct val="100000"/>
+              <a:buChar char="•"/>
+            </a:pPr>
+            <a:r>
+              <a:rPr lang="en-US" sz="1600" dirty="0">
+                <a:solidFill>
+                  <a:srgbClr val="1F2A37"/>
+                </a:solidFill>
+                <a:latin typeface="Calibri" pitchFamily="34" charset="0"/>
+                <a:ea typeface="Calibri" pitchFamily="34" charset="-122"/>
+                <a:cs typeface="Calibri" pitchFamily="34" charset="-120"/>
+              </a:rPr>
+              <a:t>Жгут (на тренажёре) с отметкой времени</a:t>
+            </a:r>
+            <a:endParaRPr lang="en-US" sz="1600" dirty="0"/>
+          </a:p>
+          <a:p>
+            <a:pPr marL="342900" indent="-342900">
+              <a:spcAft>
+                <a:spcPts val="800"/>
+              </a:spcAft>
+              <a:buSzPct val="100000"/>
+              <a:buChar char="•"/>
+            </a:pPr>
+            <a:r>
+              <a:rPr lang="en-US" sz="1600" dirty="0">
+                <a:solidFill>
+                  <a:srgbClr val="1F2A37"/>
+                </a:solidFill>
+                <a:latin typeface="Calibri" pitchFamily="34" charset="0"/>
+                <a:ea typeface="Calibri" pitchFamily="34" charset="-122"/>
+                <a:cs typeface="Calibri" pitchFamily="34" charset="-120"/>
+              </a:rPr>
+              <a:t>Вызов помощи</a:t>
+            </a:r>
+            <a:endParaRPr lang="en-US" sz="1600" dirty="0"/>
           </a:p>
         </p:txBody>
       </p:sp>
